--- a/sesion9/Sesion9_Teoria_Preliminar.pptx
+++ b/sesion9/Sesion9_Teoria_Preliminar.pptx
@@ -7376,11 +7376,11 @@
         <p:spPr>
           <a:xfrm>
             <a:off x="548640" y="2194560"/>
-            <a:ext cx="3515258" cy="1417320"/>
+            <a:ext cx="3515258" cy="1600200"/>
           </a:xfrm>
           <a:prstGeom prst="roundRect">
             <a:avLst>
-              <a:gd name="adj" fmla="val 5161"/>
+              <a:gd name="adj" fmla="val 4571"/>
             </a:avLst>
           </a:prstGeom>
           <a:solidFill>
@@ -7403,7 +7403,7 @@
         <p:spPr>
           <a:xfrm>
             <a:off x="685800" y="2331720"/>
-            <a:ext cx="3240938" cy="320040"/>
+            <a:ext cx="3240938" cy="274320"/>
           </a:xfrm>
           <a:prstGeom prst="rect">
             <a:avLst/>
@@ -7449,8 +7449,8 @@
         </p:blipFill>
         <p:spPr>
           <a:xfrm>
-            <a:off x="685800" y="2932697"/>
-            <a:ext cx="3240938" cy="306807"/>
+            <a:off x="685800" y="2668667"/>
+            <a:ext cx="3240938" cy="423385"/>
           </a:xfrm>
           <a:prstGeom prst="rect">
             <a:avLst/>
@@ -7459,18 +7459,60 @@
       </p:pic>
       <p:sp>
         <p:nvSpPr>
-          <p:cNvPr id="8" name="Shape 4"/>
+          <p:cNvPr id="8" name="Text 4"/>
+          <p:cNvSpPr/>
+          <p:nvPr/>
+        </p:nvSpPr>
+        <p:spPr>
+          <a:xfrm>
+            <a:off x="685800" y="3154680"/>
+            <a:ext cx="3240938" cy="548640"/>
+          </a:xfrm>
+          <a:prstGeom prst="rect">
+            <a:avLst/>
+          </a:prstGeom>
+          <a:noFill/>
+          <a:ln/>
+        </p:spPr>
+        <p:txBody>
+          <a:bodyPr wrap="square" lIns="0" tIns="0" rIns="0" bIns="0" rtlCol="0" anchor="t"/>
+          <a:lstStyle/>
+          <a:p>
+            <a:pPr algn="ctr" indent="0" marL="0">
+              <a:lnSpc>
+                <a:spcPct val="110000"/>
+              </a:lnSpc>
+              <a:buNone/>
+            </a:pPr>
+            <a:r>
+              <a:rPr lang="en-US" sz="1150" dirty="0">
+                <a:solidFill>
+                  <a:srgbClr val="CBD5E1"/>
+                </a:solidFill>
+                <a:latin typeface="Calibri" pitchFamily="34" charset="0"/>
+                <a:ea typeface="Calibri" pitchFamily="34" charset="-122"/>
+                <a:cs typeface="Calibri" pitchFamily="34" charset="-120"/>
+              </a:rPr>
+              <a:t>⟹ C₂sin(2π)=0 → cualquier C₂</a:t>
+            </a:r>
+            <a:endParaRPr lang="en-US" sz="1150" dirty="0"/>
+          </a:p>
+        </p:txBody>
+      </p:sp>
+      <p:sp>
+        <p:nvSpPr>
+          <p:cNvPr id="9" name="Shape 5"/>
           <p:cNvSpPr/>
           <p:nvPr/>
         </p:nvSpPr>
         <p:spPr>
           <a:xfrm>
             <a:off x="4338218" y="2194560"/>
-            <a:ext cx="3515258" cy="1417320"/>
+            <a:ext cx="3515258" cy="1600200"/>
           </a:xfrm>
           <a:prstGeom prst="roundRect">
             <a:avLst>
-              <a:gd name="adj" fmla="val 5161"/>
+              <a:gd name="adj" fmla="val 4571"/>
             </a:avLst>
           </a:prstGeom>
           <a:solidFill>
@@ -7486,14 +7528,14 @@
       </p:sp>
       <p:sp>
         <p:nvSpPr>
-          <p:cNvPr id="9" name="Text 5"/>
+          <p:cNvPr id="10" name="Text 6"/>
           <p:cNvSpPr/>
           <p:nvPr/>
         </p:nvSpPr>
         <p:spPr>
           <a:xfrm>
             <a:off x="4475378" y="2331720"/>
-            <a:ext cx="3240938" cy="320040"/>
+            <a:ext cx="3240938" cy="274320"/>
           </a:xfrm>
           <a:prstGeom prst="rect">
             <a:avLst/>
@@ -7525,7 +7567,7 @@
       </p:sp>
       <p:pic>
         <p:nvPicPr>
-          <p:cNvPr id="10" name="Image 2" descr="build/eq/bvp_case2.png">    </p:cNvPr>
+          <p:cNvPr id="11" name="Image 2" descr="build/eq/bvp_case2.png">    </p:cNvPr>
           <p:cNvPicPr>
             <a:picLocks noChangeAspect="1"/>
           </p:cNvPicPr>
@@ -7539,8 +7581,8 @@
         </p:blipFill>
         <p:spPr>
           <a:xfrm>
-            <a:off x="4475378" y="2932697"/>
-            <a:ext cx="3240938" cy="306807"/>
+            <a:off x="4475378" y="2668667"/>
+            <a:ext cx="3240938" cy="423385"/>
           </a:xfrm>
           <a:prstGeom prst="rect">
             <a:avLst/>
@@ -7549,18 +7591,60 @@
       </p:pic>
       <p:sp>
         <p:nvSpPr>
-          <p:cNvPr id="11" name="Shape 6"/>
+          <p:cNvPr id="12" name="Text 7"/>
+          <p:cNvSpPr/>
+          <p:nvPr/>
+        </p:nvSpPr>
+        <p:spPr>
+          <a:xfrm>
+            <a:off x="4475378" y="3154680"/>
+            <a:ext cx="3240938" cy="548640"/>
+          </a:xfrm>
+          <a:prstGeom prst="rect">
+            <a:avLst/>
+          </a:prstGeom>
+          <a:noFill/>
+          <a:ln/>
+        </p:spPr>
+        <p:txBody>
+          <a:bodyPr wrap="square" lIns="0" tIns="0" rIns="0" bIns="0" rtlCol="0" anchor="t"/>
+          <a:lstStyle/>
+          <a:p>
+            <a:pPr algn="ctr" indent="0" marL="0">
+              <a:lnSpc>
+                <a:spcPct val="110000"/>
+              </a:lnSpc>
+              <a:buNone/>
+            </a:pPr>
+            <a:r>
+              <a:rPr lang="en-US" sz="1150" dirty="0">
+                <a:solidFill>
+                  <a:srgbClr val="CBD5E1"/>
+                </a:solidFill>
+                <a:latin typeface="Calibri" pitchFamily="34" charset="0"/>
+                <a:ea typeface="Calibri" pitchFamily="34" charset="-122"/>
+                <a:cs typeface="Calibri" pitchFamily="34" charset="-120"/>
+              </a:rPr>
+              <a:t>⟹ C₂sin(2π)=1 → imposible</a:t>
+            </a:r>
+            <a:endParaRPr lang="en-US" sz="1150" dirty="0"/>
+          </a:p>
+        </p:txBody>
+      </p:sp>
+      <p:sp>
+        <p:nvSpPr>
+          <p:cNvPr id="13" name="Shape 8"/>
           <p:cNvSpPr/>
           <p:nvPr/>
         </p:nvSpPr>
         <p:spPr>
           <a:xfrm>
             <a:off x="8127797" y="2194560"/>
-            <a:ext cx="3515258" cy="1417320"/>
+            <a:ext cx="3515258" cy="1600200"/>
           </a:xfrm>
           <a:prstGeom prst="roundRect">
             <a:avLst>
-              <a:gd name="adj" fmla="val 5161"/>
+              <a:gd name="adj" fmla="val 4571"/>
             </a:avLst>
           </a:prstGeom>
           <a:solidFill>
@@ -7576,14 +7660,14 @@
       </p:sp>
       <p:sp>
         <p:nvSpPr>
-          <p:cNvPr id="12" name="Text 7"/>
+          <p:cNvPr id="14" name="Text 9"/>
           <p:cNvSpPr/>
           <p:nvPr/>
         </p:nvSpPr>
         <p:spPr>
           <a:xfrm>
             <a:off x="8264957" y="2331720"/>
-            <a:ext cx="3240938" cy="320040"/>
+            <a:ext cx="3240938" cy="274320"/>
           </a:xfrm>
           <a:prstGeom prst="rect">
             <a:avLst/>
@@ -7615,7 +7699,7 @@
       </p:sp>
       <p:pic>
         <p:nvPicPr>
-          <p:cNvPr id="13" name="Image 3" descr="build/eq/bvp_case3.png">    </p:cNvPr>
+          <p:cNvPr id="15" name="Image 3" descr="build/eq/bvp_case3.png">    </p:cNvPr>
           <p:cNvPicPr>
             <a:picLocks noChangeAspect="1"/>
           </p:cNvPicPr>
@@ -7629,8 +7713,8 @@
         </p:blipFill>
         <p:spPr>
           <a:xfrm>
-            <a:off x="8264957" y="2938239"/>
-            <a:ext cx="3240938" cy="295722"/>
+            <a:off x="8264957" y="2668667"/>
+            <a:ext cx="3240938" cy="423385"/>
           </a:xfrm>
           <a:prstGeom prst="rect">
             <a:avLst/>
@@ -7639,18 +7723,60 @@
       </p:pic>
       <p:sp>
         <p:nvSpPr>
-          <p:cNvPr id="14" name="Shape 8"/>
-          <p:cNvSpPr/>
-          <p:nvPr/>
-        </p:nvSpPr>
-        <p:spPr>
-          <a:xfrm>
-            <a:off x="548640" y="3886200"/>
-            <a:ext cx="11094415" cy="2514600"/>
+          <p:cNvPr id="16" name="Text 10"/>
+          <p:cNvSpPr/>
+          <p:nvPr/>
+        </p:nvSpPr>
+        <p:spPr>
+          <a:xfrm>
+            <a:off x="8264957" y="3154680"/>
+            <a:ext cx="3240938" cy="548640"/>
+          </a:xfrm>
+          <a:prstGeom prst="rect">
+            <a:avLst/>
+          </a:prstGeom>
+          <a:noFill/>
+          <a:ln/>
+        </p:spPr>
+        <p:txBody>
+          <a:bodyPr wrap="square" lIns="0" tIns="0" rIns="0" bIns="0" rtlCol="0" anchor="t"/>
+          <a:lstStyle/>
+          <a:p>
+            <a:pPr algn="ctr" indent="0" marL="0">
+              <a:lnSpc>
+                <a:spcPct val="110000"/>
+              </a:lnSpc>
+              <a:buNone/>
+            </a:pPr>
+            <a:r>
+              <a:rPr lang="en-US" sz="1150" dirty="0">
+                <a:solidFill>
+                  <a:srgbClr val="CBD5E1"/>
+                </a:solidFill>
+                <a:latin typeface="Calibri" pitchFamily="34" charset="0"/>
+                <a:ea typeface="Calibri" pitchFamily="34" charset="-122"/>
+                <a:cs typeface="Calibri" pitchFamily="34" charset="-120"/>
+              </a:rPr>
+              <a:t>⟹ C₂sin(π/2)=0 → C₂=0</a:t>
+            </a:r>
+            <a:endParaRPr lang="en-US" sz="1150" dirty="0"/>
+          </a:p>
+        </p:txBody>
+      </p:sp>
+      <p:sp>
+        <p:nvSpPr>
+          <p:cNvPr id="17" name="Shape 11"/>
+          <p:cNvSpPr/>
+          <p:nvPr/>
+        </p:nvSpPr>
+        <p:spPr>
+          <a:xfrm>
+            <a:off x="548640" y="4069080"/>
+            <a:ext cx="11094415" cy="2331720"/>
           </a:xfrm>
           <a:prstGeom prst="roundRect">
             <a:avLst>
-              <a:gd name="adj" fmla="val 3636"/>
+              <a:gd name="adj" fmla="val 3922"/>
             </a:avLst>
           </a:prstGeom>
           <a:solidFill>
@@ -7661,7 +7787,7 @@
       </p:sp>
       <p:pic>
         <p:nvPicPr>
-          <p:cNvPr id="15" name="Image 4" descr="build/img/bvp_family.png">    </p:cNvPr>
+          <p:cNvPr id="18" name="Image 4" descr="build/img/bvp_family.png">    </p:cNvPr>
           <p:cNvPicPr>
             <a:picLocks noChangeAspect="1"/>
           </p:cNvPicPr>
@@ -7675,8 +7801,8 @@
         </p:blipFill>
         <p:spPr>
           <a:xfrm>
-            <a:off x="4614745" y="4023360"/>
-            <a:ext cx="2962204" cy="1874520"/>
+            <a:off x="4759243" y="4206240"/>
+            <a:ext cx="2673209" cy="1691640"/>
           </a:xfrm>
           <a:prstGeom prst="rect">
             <a:avLst/>
@@ -7685,7 +7811,7 @@
       </p:pic>
       <p:sp>
         <p:nvSpPr>
-          <p:cNvPr id="16" name="Text 9"/>
+          <p:cNvPr id="19" name="Text 12"/>
           <p:cNvSpPr/>
           <p:nvPr/>
         </p:nvSpPr>
@@ -7727,7 +7853,7 @@
       </p:sp>
       <p:sp>
         <p:nvSpPr>
-          <p:cNvPr id="17" name="Text 10"/>
+          <p:cNvPr id="20" name="Text 13"/>
           <p:cNvSpPr/>
           <p:nvPr/>
         </p:nvSpPr>
@@ -7766,7 +7892,7 @@
       </p:sp>
       <p:sp>
         <p:nvSpPr>
-          <p:cNvPr id="18" name="Text 11"/>
+          <p:cNvPr id="21" name="Text 14"/>
           <p:cNvSpPr/>
           <p:nvPr/>
         </p:nvSpPr>

--- a/sesion9/Sesion9_Teoria_Preliminar.pptx
+++ b/sesion9/Sesion9_Teoria_Preliminar.pptx
@@ -8048,11 +8048,80 @@
         <p:spPr>
           <a:xfrm>
             <a:off x="548640" y="1691640"/>
-            <a:ext cx="11094415" cy="1371600"/>
+            <a:ext cx="11094415" cy="960120"/>
           </a:xfrm>
           <a:prstGeom prst="roundRect">
             <a:avLst>
-              <a:gd name="adj" fmla="val 5333"/>
+              <a:gd name="adj" fmla="val 7619"/>
+            </a:avLst>
+          </a:prstGeom>
+          <a:solidFill>
+            <a:srgbClr val="3A2A0E"/>
+          </a:solidFill>
+          <a:ln w="12700">
+            <a:solidFill>
+              <a:srgbClr val="F59E0B"/>
+            </a:solidFill>
+            <a:prstDash val="solid"/>
+          </a:ln>
+        </p:spPr>
+      </p:sp>
+      <p:sp>
+        <p:nvSpPr>
+          <p:cNvPr id="5" name="Text 3"/>
+          <p:cNvSpPr/>
+          <p:nvPr/>
+        </p:nvSpPr>
+        <p:spPr>
+          <a:xfrm>
+            <a:off x="777240" y="1691640"/>
+            <a:ext cx="10637215" cy="960120"/>
+          </a:xfrm>
+          <a:prstGeom prst="rect">
+            <a:avLst/>
+          </a:prstGeom>
+          <a:noFill/>
+          <a:ln/>
+        </p:spPr>
+        <p:txBody>
+          <a:bodyPr wrap="square" lIns="0" tIns="0" rIns="0" bIns="0" rtlCol="0" anchor="ctr"/>
+          <a:lstStyle/>
+          <a:p>
+            <a:pPr algn="l" indent="0" marL="0">
+              <a:lnSpc>
+                <a:spcPct val="115000"/>
+              </a:lnSpc>
+              <a:buNone/>
+            </a:pPr>
+            <a:r>
+              <a:rPr lang="en-US" sz="1350" b="1" dirty="0">
+                <a:solidFill>
+                  <a:srgbClr val="FBBF24"/>
+                </a:solidFill>
+                <a:latin typeface="Calibri" pitchFamily="34" charset="0"/>
+                <a:ea typeface="Calibri" pitchFamily="34" charset="-122"/>
+                <a:cs typeface="Calibri" pitchFamily="34" charset="-120"/>
+              </a:rPr>
+              <a:t>⚠ 'Homogénea' cambia de significado aquí. En la Sesión 7 era dy/dx=f(y/x), resuelta con y=vx. Desde ahora significa g(x)=0 — el lado derecho es cero. Dos ideas distintas, mismo nombre: no las confundan.</a:t>
+            </a:r>
+            <a:endParaRPr lang="en-US" sz="1350" dirty="0"/>
+          </a:p>
+        </p:txBody>
+      </p:sp>
+      <p:sp>
+        <p:nvSpPr>
+          <p:cNvPr id="6" name="Shape 4"/>
+          <p:cNvSpPr/>
+          <p:nvPr/>
+        </p:nvSpPr>
+        <p:spPr>
+          <a:xfrm>
+            <a:off x="548640" y="2788920"/>
+            <a:ext cx="11094415" cy="1097280"/>
+          </a:xfrm>
+          <a:prstGeom prst="roundRect">
+            <a:avLst>
+              <a:gd name="adj" fmla="val 6667"/>
             </a:avLst>
           </a:prstGeom>
           <a:solidFill>
@@ -8068,7 +8137,7 @@
       </p:sp>
       <p:pic>
         <p:nvPicPr>
-          <p:cNvPr id="5" name="Image 0" descr="build/eq/superposition_homog.png">    </p:cNvPr>
+          <p:cNvPr id="7" name="Image 0" descr="build/eq/superposition_homog.png">    </p:cNvPr>
           <p:cNvPicPr>
             <a:picLocks noChangeAspect="1"/>
           </p:cNvPicPr>
@@ -8082,8 +8151,8 @@
         </p:blipFill>
         <p:spPr>
           <a:xfrm>
-            <a:off x="822960" y="1864985"/>
-            <a:ext cx="10545775" cy="1024909"/>
+            <a:off x="1861935" y="2926080"/>
+            <a:ext cx="8467825" cy="822960"/>
           </a:xfrm>
           <a:prstGeom prst="rect">
             <a:avLst/>
@@ -8092,14 +8161,14 @@
       </p:pic>
       <p:sp>
         <p:nvSpPr>
-          <p:cNvPr id="6" name="Text 3"/>
-          <p:cNvSpPr/>
-          <p:nvPr/>
-        </p:nvSpPr>
-        <p:spPr>
-          <a:xfrm>
-            <a:off x="548640" y="3337560"/>
-            <a:ext cx="11094415" cy="822960"/>
+          <p:cNvPr id="8" name="Text 5"/>
+          <p:cNvSpPr/>
+          <p:nvPr/>
+        </p:nvSpPr>
+        <p:spPr>
+          <a:xfrm>
+            <a:off x="548640" y="4023360"/>
+            <a:ext cx="11094415" cy="731520"/>
           </a:xfrm>
           <a:prstGeom prst="rect">
             <a:avLst/>
@@ -8118,7 +8187,7 @@
               <a:buNone/>
             </a:pPr>
             <a:r>
-              <a:rPr lang="en-US" sz="1500" dirty="0">
+              <a:rPr lang="en-US" sz="1450" dirty="0">
                 <a:solidFill>
                   <a:srgbClr val="CBD5E1"/>
                 </a:solidFill>
@@ -8126,26 +8195,26 @@
                 <a:ea typeface="Calibri" pitchFamily="34" charset="-122"/>
                 <a:cs typeface="Calibri" pitchFamily="34" charset="-120"/>
               </a:rPr>
-              <a:t>Si y₁, y₂, …, yₖ son soluciones de la MISMA ecuación homogénea, entonces cualquier combinación lineal de ellas también es solución. Pueden verificarlo sustituyendo directamente.</a:t>
-            </a:r>
-            <a:endParaRPr lang="en-US" sz="1500" dirty="0"/>
-          </a:p>
-        </p:txBody>
-      </p:sp>
-      <p:sp>
-        <p:nvSpPr>
-          <p:cNvPr id="7" name="Shape 4"/>
-          <p:cNvSpPr/>
-          <p:nvPr/>
-        </p:nvSpPr>
-        <p:spPr>
-          <a:xfrm>
-            <a:off x="548640" y="4343400"/>
-            <a:ext cx="11094415" cy="777240"/>
+              <a:t>Si y₁, y₂, …, yₖ son soluciones de la MISMA ecuación homogénea (en este nuevo sentido), entonces cualquier combinación lineal de ellas también es solución. Pueden verificarlo sustituyendo directamente.</a:t>
+            </a:r>
+            <a:endParaRPr lang="en-US" sz="1450" dirty="0"/>
+          </a:p>
+        </p:txBody>
+      </p:sp>
+      <p:sp>
+        <p:nvSpPr>
+          <p:cNvPr id="9" name="Shape 6"/>
+          <p:cNvSpPr/>
+          <p:nvPr/>
+        </p:nvSpPr>
+        <p:spPr>
+          <a:xfrm>
+            <a:off x="548640" y="4892040"/>
+            <a:ext cx="11094415" cy="731520"/>
           </a:xfrm>
           <a:prstGeom prst="roundRect">
             <a:avLst>
-              <a:gd name="adj" fmla="val 9412"/>
+              <a:gd name="adj" fmla="val 10000"/>
             </a:avLst>
           </a:prstGeom>
           <a:solidFill>
@@ -8161,14 +8230,14 @@
       </p:sp>
       <p:sp>
         <p:nvSpPr>
-          <p:cNvPr id="8" name="Text 5"/>
-          <p:cNvSpPr/>
-          <p:nvPr/>
-        </p:nvSpPr>
-        <p:spPr>
-          <a:xfrm>
-            <a:off x="777240" y="4343400"/>
-            <a:ext cx="10637215" cy="777240"/>
+          <p:cNvPr id="10" name="Text 7"/>
+          <p:cNvSpPr/>
+          <p:nvPr/>
+        </p:nvSpPr>
+        <p:spPr>
+          <a:xfrm>
+            <a:off x="777240" y="4892040"/>
+            <a:ext cx="10637215" cy="731520"/>
           </a:xfrm>
           <a:prstGeom prst="rect">
             <a:avLst/>
@@ -8187,7 +8256,7 @@
               <a:buNone/>
             </a:pPr>
             <a:r>
-              <a:rPr lang="en-US" sz="1400" b="1" dirty="0">
+              <a:rPr lang="en-US" sz="1350" b="1" dirty="0">
                 <a:solidFill>
                   <a:srgbClr val="34D399"/>
                 </a:solidFill>
@@ -8197,13 +8266,13 @@
               </a:rPr>
               <a:t>Esta es la razón por la que, en la Sesión 10, nunca vamos a buscar 'la' solución — vamos a buscar varias soluciones simples y combinarlas.</a:t>
             </a:r>
-            <a:endParaRPr lang="en-US" sz="1400" dirty="0"/>
-          </a:p>
-        </p:txBody>
-      </p:sp>
-      <p:sp>
-        <p:nvSpPr>
-          <p:cNvPr id="9" name="Text 6"/>
+            <a:endParaRPr lang="en-US" sz="1350" dirty="0"/>
+          </a:p>
+        </p:txBody>
+      </p:sp>
+      <p:sp>
+        <p:nvSpPr>
+          <p:cNvPr id="11" name="Text 8"/>
           <p:cNvSpPr/>
           <p:nvPr/>
         </p:nvSpPr>
@@ -8242,7 +8311,7 @@
       </p:sp>
       <p:sp>
         <p:nvSpPr>
-          <p:cNvPr id="10" name="Text 7"/>
+          <p:cNvPr id="12" name="Text 9"/>
           <p:cNvSpPr/>
           <p:nvPr/>
         </p:nvSpPr>

--- a/sesion9/Sesion9_Teoria_Preliminar.pptx
+++ b/sesion9/Sesion9_Teoria_Preliminar.pptx
@@ -6146,12 +6146,12 @@
         </p:nvSpPr>
         <p:spPr>
           <a:xfrm>
-            <a:off x="548640" y="1645920"/>
-            <a:ext cx="11094415" cy="1051560"/>
+            <a:off x="548640" y="1600200"/>
+            <a:ext cx="11094415" cy="960120"/>
           </a:xfrm>
           <a:prstGeom prst="roundRect">
             <a:avLst>
-              <a:gd name="adj" fmla="val 8696"/>
+              <a:gd name="adj" fmla="val 9524"/>
             </a:avLst>
           </a:prstGeom>
           <a:solidFill>
@@ -6176,8 +6176,8 @@
         </p:blipFill>
         <p:spPr>
           <a:xfrm>
-            <a:off x="2386994" y="1783080"/>
-            <a:ext cx="7417707" cy="777240"/>
+            <a:off x="2823330" y="1737360"/>
+            <a:ext cx="6545036" cy="685800"/>
           </a:xfrm>
           <a:prstGeom prst="rect">
             <a:avLst/>
@@ -6192,12 +6192,81 @@
         </p:nvSpPr>
         <p:spPr>
           <a:xfrm>
-            <a:off x="548640" y="2880360"/>
-            <a:ext cx="11094415" cy="1051560"/>
+            <a:off x="548640" y="2651760"/>
+            <a:ext cx="11094415" cy="914400"/>
           </a:xfrm>
           <a:prstGeom prst="roundRect">
             <a:avLst>
-              <a:gd name="adj" fmla="val 8696"/>
+              <a:gd name="adj" fmla="val 8000"/>
+            </a:avLst>
+          </a:prstGeom>
+          <a:solidFill>
+            <a:srgbClr val="3A2A0E"/>
+          </a:solidFill>
+          <a:ln w="12700">
+            <a:solidFill>
+              <a:srgbClr val="F59E0B"/>
+            </a:solidFill>
+            <a:prstDash val="solid"/>
+          </a:ln>
+        </p:spPr>
+      </p:sp>
+      <p:sp>
+        <p:nvSpPr>
+          <p:cNvPr id="7" name="Text 4"/>
+          <p:cNvSpPr/>
+          <p:nvPr/>
+        </p:nvSpPr>
+        <p:spPr>
+          <a:xfrm>
+            <a:off x="777240" y="2651760"/>
+            <a:ext cx="10637215" cy="914400"/>
+          </a:xfrm>
+          <a:prstGeom prst="rect">
+            <a:avLst/>
+          </a:prstGeom>
+          <a:noFill/>
+          <a:ln/>
+        </p:spPr>
+        <p:txBody>
+          <a:bodyPr wrap="square" lIns="0" tIns="0" rIns="0" bIns="0" rtlCol="0" anchor="ctr"/>
+          <a:lstStyle/>
+          <a:p>
+            <a:pPr algn="l" indent="0" marL="0">
+              <a:lnSpc>
+                <a:spcPct val="115000"/>
+              </a:lnSpc>
+              <a:buNone/>
+            </a:pPr>
+            <a:r>
+              <a:rPr lang="en-US" sz="1300" b="1" dirty="0">
+                <a:solidFill>
+                  <a:srgbClr val="FBBF24"/>
+                </a:solidFill>
+                <a:latin typeface="Calibri" pitchFamily="34" charset="0"/>
+                <a:ea typeface="Calibri" pitchFamily="34" charset="-122"/>
+                <a:cs typeface="Calibri" pitchFamily="34" charset="-120"/>
+              </a:rPr>
+              <a:t>⚠ Fíjense en g(x). Si g(x)=0, la ecuación es homogénea; si no, es no homogénea. Ojo: esto NO es la 'homogénea' de la Sesión 7 (dy/dx=f(y/x), y=vx) — dos ideas sin relación que comparten nombre.</a:t>
+            </a:r>
+            <a:endParaRPr lang="en-US" sz="1300" dirty="0"/>
+          </a:p>
+        </p:txBody>
+      </p:sp>
+      <p:sp>
+        <p:nvSpPr>
+          <p:cNvPr id="8" name="Shape 5"/>
+          <p:cNvSpPr/>
+          <p:nvPr/>
+        </p:nvSpPr>
+        <p:spPr>
+          <a:xfrm>
+            <a:off x="548640" y="3657600"/>
+            <a:ext cx="11094415" cy="960120"/>
+          </a:xfrm>
+          <a:prstGeom prst="roundRect">
+            <a:avLst>
+              <a:gd name="adj" fmla="val 9524"/>
             </a:avLst>
           </a:prstGeom>
           <a:solidFill>
@@ -6208,7 +6277,7 @@
       </p:sp>
       <p:pic>
         <p:nvPicPr>
-          <p:cNvPr id="7" name="Image 1" descr="build/eq/pvi_conditions.png">    </p:cNvPr>
+          <p:cNvPr id="9" name="Image 1" descr="build/eq/pvi_conditions.png">    </p:cNvPr>
           <p:cNvPicPr>
             <a:picLocks noChangeAspect="1"/>
           </p:cNvPicPr>
@@ -6222,8 +6291,8 @@
         </p:blipFill>
         <p:spPr>
           <a:xfrm>
-            <a:off x="822960" y="3045818"/>
-            <a:ext cx="10545775" cy="720645"/>
+            <a:off x="1077917" y="3794760"/>
+            <a:ext cx="10035862" cy="685800"/>
           </a:xfrm>
           <a:prstGeom prst="rect">
             <a:avLst/>
@@ -6232,14 +6301,14 @@
       </p:pic>
       <p:sp>
         <p:nvSpPr>
-          <p:cNvPr id="8" name="Text 4"/>
-          <p:cNvSpPr/>
-          <p:nvPr/>
-        </p:nvSpPr>
-        <p:spPr>
-          <a:xfrm>
-            <a:off x="548640" y="4160520"/>
-            <a:ext cx="11094415" cy="822960"/>
+          <p:cNvPr id="10" name="Text 6"/>
+          <p:cNvSpPr/>
+          <p:nvPr/>
+        </p:nvSpPr>
+        <p:spPr>
+          <a:xfrm>
+            <a:off x="548640" y="4709160"/>
+            <a:ext cx="11094415" cy="685800"/>
           </a:xfrm>
           <a:prstGeom prst="rect">
             <a:avLst/>
@@ -6258,7 +6327,7 @@
               <a:buNone/>
             </a:pPr>
             <a:r>
-              <a:rPr lang="en-US" sz="1450" dirty="0">
+              <a:rPr lang="en-US" sz="1400" dirty="0">
                 <a:solidFill>
                   <a:srgbClr val="CBD5E1"/>
                 </a:solidFill>
@@ -6268,19 +6337,19 @@
               </a:rPr>
               <a:t>Necesitan una condición por cada derivada, hasta la (n−1)-ésima, todas evaluadas en el mismo punto x₀. Para segundo orden: posición y velocidad iniciales. Para tercer orden, agregan la aceleración inicial.</a:t>
             </a:r>
-            <a:endParaRPr lang="en-US" sz="1450" dirty="0"/>
-          </a:p>
-        </p:txBody>
-      </p:sp>
-      <p:sp>
-        <p:nvSpPr>
-          <p:cNvPr id="9" name="Shape 5"/>
-          <p:cNvSpPr/>
-          <p:nvPr/>
-        </p:nvSpPr>
-        <p:spPr>
-          <a:xfrm>
-            <a:off x="548640" y="5074920"/>
+            <a:endParaRPr lang="en-US" sz="1400" dirty="0"/>
+          </a:p>
+        </p:txBody>
+      </p:sp>
+      <p:sp>
+        <p:nvSpPr>
+          <p:cNvPr id="11" name="Shape 7"/>
+          <p:cNvSpPr/>
+          <p:nvPr/>
+        </p:nvSpPr>
+        <p:spPr>
+          <a:xfrm>
+            <a:off x="548640" y="5486400"/>
             <a:ext cx="11094415" cy="566928"/>
           </a:xfrm>
           <a:prstGeom prst="roundRect">
@@ -6301,13 +6370,13 @@
       </p:sp>
       <p:sp>
         <p:nvSpPr>
-          <p:cNvPr id="10" name="Text 6"/>
-          <p:cNvSpPr/>
-          <p:nvPr/>
-        </p:nvSpPr>
-        <p:spPr>
-          <a:xfrm>
-            <a:off x="777240" y="5074920"/>
+          <p:cNvPr id="12" name="Text 8"/>
+          <p:cNvSpPr/>
+          <p:nvPr/>
+        </p:nvSpPr>
+        <p:spPr>
+          <a:xfrm>
+            <a:off x="777240" y="5486400"/>
             <a:ext cx="10637215" cy="566928"/>
           </a:xfrm>
           <a:prstGeom prst="rect">
@@ -6327,7 +6396,7 @@
               <a:buNone/>
             </a:pPr>
             <a:r>
-              <a:rPr lang="en-US" sz="1350" b="1" dirty="0">
+              <a:rPr lang="en-US" sz="1300" b="1" dirty="0">
                 <a:solidFill>
                   <a:srgbClr val="34D399"/>
                 </a:solidFill>
@@ -6337,13 +6406,13 @@
               </a:rPr>
               <a:t>Ingenieros: cuenten las condiciones antes de empezar — si les faltan o les sobran, algo está mal planteado.</a:t>
             </a:r>
-            <a:endParaRPr lang="en-US" sz="1350" dirty="0"/>
-          </a:p>
-        </p:txBody>
-      </p:sp>
-      <p:sp>
-        <p:nvSpPr>
-          <p:cNvPr id="11" name="Text 7"/>
+            <a:endParaRPr lang="en-US" sz="1300" dirty="0"/>
+          </a:p>
+        </p:txBody>
+      </p:sp>
+      <p:sp>
+        <p:nvSpPr>
+          <p:cNvPr id="13" name="Text 9"/>
           <p:cNvSpPr/>
           <p:nvPr/>
         </p:nvSpPr>
@@ -6382,7 +6451,7 @@
       </p:sp>
       <p:sp>
         <p:nvSpPr>
-          <p:cNvPr id="12" name="Text 8"/>
+          <p:cNvPr id="14" name="Text 10"/>
           <p:cNvSpPr/>
           <p:nvPr/>
         </p:nvSpPr>
@@ -8048,80 +8117,11 @@
         <p:spPr>
           <a:xfrm>
             <a:off x="548640" y="1691640"/>
-            <a:ext cx="11094415" cy="960120"/>
+            <a:ext cx="11094415" cy="1371600"/>
           </a:xfrm>
           <a:prstGeom prst="roundRect">
             <a:avLst>
-              <a:gd name="adj" fmla="val 7619"/>
-            </a:avLst>
-          </a:prstGeom>
-          <a:solidFill>
-            <a:srgbClr val="3A2A0E"/>
-          </a:solidFill>
-          <a:ln w="12700">
-            <a:solidFill>
-              <a:srgbClr val="F59E0B"/>
-            </a:solidFill>
-            <a:prstDash val="solid"/>
-          </a:ln>
-        </p:spPr>
-      </p:sp>
-      <p:sp>
-        <p:nvSpPr>
-          <p:cNvPr id="5" name="Text 3"/>
-          <p:cNvSpPr/>
-          <p:nvPr/>
-        </p:nvSpPr>
-        <p:spPr>
-          <a:xfrm>
-            <a:off x="777240" y="1691640"/>
-            <a:ext cx="10637215" cy="960120"/>
-          </a:xfrm>
-          <a:prstGeom prst="rect">
-            <a:avLst/>
-          </a:prstGeom>
-          <a:noFill/>
-          <a:ln/>
-        </p:spPr>
-        <p:txBody>
-          <a:bodyPr wrap="square" lIns="0" tIns="0" rIns="0" bIns="0" rtlCol="0" anchor="ctr"/>
-          <a:lstStyle/>
-          <a:p>
-            <a:pPr algn="l" indent="0" marL="0">
-              <a:lnSpc>
-                <a:spcPct val="115000"/>
-              </a:lnSpc>
-              <a:buNone/>
-            </a:pPr>
-            <a:r>
-              <a:rPr lang="en-US" sz="1350" b="1" dirty="0">
-                <a:solidFill>
-                  <a:srgbClr val="FBBF24"/>
-                </a:solidFill>
-                <a:latin typeface="Calibri" pitchFamily="34" charset="0"/>
-                <a:ea typeface="Calibri" pitchFamily="34" charset="-122"/>
-                <a:cs typeface="Calibri" pitchFamily="34" charset="-120"/>
-              </a:rPr>
-              <a:t>⚠ 'Homogénea' cambia de significado aquí. En la Sesión 7 era dy/dx=f(y/x), resuelta con y=vx. Desde ahora significa g(x)=0 — el lado derecho es cero. Dos ideas distintas, mismo nombre: no las confundan.</a:t>
-            </a:r>
-            <a:endParaRPr lang="en-US" sz="1350" dirty="0"/>
-          </a:p>
-        </p:txBody>
-      </p:sp>
-      <p:sp>
-        <p:nvSpPr>
-          <p:cNvPr id="6" name="Shape 4"/>
-          <p:cNvSpPr/>
-          <p:nvPr/>
-        </p:nvSpPr>
-        <p:spPr>
-          <a:xfrm>
-            <a:off x="548640" y="2788920"/>
-            <a:ext cx="11094415" cy="1097280"/>
-          </a:xfrm>
-          <a:prstGeom prst="roundRect">
-            <a:avLst>
-              <a:gd name="adj" fmla="val 6667"/>
+              <a:gd name="adj" fmla="val 5333"/>
             </a:avLst>
           </a:prstGeom>
           <a:solidFill>
@@ -8137,7 +8137,7 @@
       </p:sp>
       <p:pic>
         <p:nvPicPr>
-          <p:cNvPr id="7" name="Image 0" descr="build/eq/superposition_homog.png">    </p:cNvPr>
+          <p:cNvPr id="5" name="Image 0" descr="build/eq/superposition_homog.png">    </p:cNvPr>
           <p:cNvPicPr>
             <a:picLocks noChangeAspect="1"/>
           </p:cNvPicPr>
@@ -8151,8 +8151,8 @@
         </p:blipFill>
         <p:spPr>
           <a:xfrm>
-            <a:off x="1861935" y="2926080"/>
-            <a:ext cx="8467825" cy="822960"/>
+            <a:off x="822960" y="1864985"/>
+            <a:ext cx="10545775" cy="1024909"/>
           </a:xfrm>
           <a:prstGeom prst="rect">
             <a:avLst/>
@@ -8161,14 +8161,14 @@
       </p:pic>
       <p:sp>
         <p:nvSpPr>
-          <p:cNvPr id="8" name="Text 5"/>
-          <p:cNvSpPr/>
-          <p:nvPr/>
-        </p:nvSpPr>
-        <p:spPr>
-          <a:xfrm>
-            <a:off x="548640" y="4023360"/>
-            <a:ext cx="11094415" cy="731520"/>
+          <p:cNvPr id="6" name="Text 3"/>
+          <p:cNvSpPr/>
+          <p:nvPr/>
+        </p:nvSpPr>
+        <p:spPr>
+          <a:xfrm>
+            <a:off x="548640" y="3337560"/>
+            <a:ext cx="11094415" cy="822960"/>
           </a:xfrm>
           <a:prstGeom prst="rect">
             <a:avLst/>
@@ -8187,7 +8187,7 @@
               <a:buNone/>
             </a:pPr>
             <a:r>
-              <a:rPr lang="en-US" sz="1450" dirty="0">
+              <a:rPr lang="en-US" sz="1500" dirty="0">
                 <a:solidFill>
                   <a:srgbClr val="CBD5E1"/>
                 </a:solidFill>
@@ -8195,26 +8195,26 @@
                 <a:ea typeface="Calibri" pitchFamily="34" charset="-122"/>
                 <a:cs typeface="Calibri" pitchFamily="34" charset="-120"/>
               </a:rPr>
-              <a:t>Si y₁, y₂, …, yₖ son soluciones de la MISMA ecuación homogénea (en este nuevo sentido), entonces cualquier combinación lineal de ellas también es solución. Pueden verificarlo sustituyendo directamente.</a:t>
-            </a:r>
-            <a:endParaRPr lang="en-US" sz="1450" dirty="0"/>
-          </a:p>
-        </p:txBody>
-      </p:sp>
-      <p:sp>
-        <p:nvSpPr>
-          <p:cNvPr id="9" name="Shape 6"/>
-          <p:cNvSpPr/>
-          <p:nvPr/>
-        </p:nvSpPr>
-        <p:spPr>
-          <a:xfrm>
-            <a:off x="548640" y="4892040"/>
-            <a:ext cx="11094415" cy="731520"/>
+              <a:t>Si y₁, y₂, …, yₖ son soluciones de la MISMA ecuación homogénea, entonces cualquier combinación lineal de ellas también es solución. Pueden verificarlo sustituyendo directamente.</a:t>
+            </a:r>
+            <a:endParaRPr lang="en-US" sz="1500" dirty="0"/>
+          </a:p>
+        </p:txBody>
+      </p:sp>
+      <p:sp>
+        <p:nvSpPr>
+          <p:cNvPr id="7" name="Shape 4"/>
+          <p:cNvSpPr/>
+          <p:nvPr/>
+        </p:nvSpPr>
+        <p:spPr>
+          <a:xfrm>
+            <a:off x="548640" y="4343400"/>
+            <a:ext cx="11094415" cy="777240"/>
           </a:xfrm>
           <a:prstGeom prst="roundRect">
             <a:avLst>
-              <a:gd name="adj" fmla="val 10000"/>
+              <a:gd name="adj" fmla="val 9412"/>
             </a:avLst>
           </a:prstGeom>
           <a:solidFill>
@@ -8230,14 +8230,14 @@
       </p:sp>
       <p:sp>
         <p:nvSpPr>
-          <p:cNvPr id="10" name="Text 7"/>
-          <p:cNvSpPr/>
-          <p:nvPr/>
-        </p:nvSpPr>
-        <p:spPr>
-          <a:xfrm>
-            <a:off x="777240" y="4892040"/>
-            <a:ext cx="10637215" cy="731520"/>
+          <p:cNvPr id="8" name="Text 5"/>
+          <p:cNvSpPr/>
+          <p:nvPr/>
+        </p:nvSpPr>
+        <p:spPr>
+          <a:xfrm>
+            <a:off x="777240" y="4343400"/>
+            <a:ext cx="10637215" cy="777240"/>
           </a:xfrm>
           <a:prstGeom prst="rect">
             <a:avLst/>
@@ -8256,7 +8256,7 @@
               <a:buNone/>
             </a:pPr>
             <a:r>
-              <a:rPr lang="en-US" sz="1350" b="1" dirty="0">
+              <a:rPr lang="en-US" sz="1400" b="1" dirty="0">
                 <a:solidFill>
                   <a:srgbClr val="34D399"/>
                 </a:solidFill>
@@ -8266,13 +8266,13 @@
               </a:rPr>
               <a:t>Esta es la razón por la que, en la Sesión 10, nunca vamos a buscar 'la' solución — vamos a buscar varias soluciones simples y combinarlas.</a:t>
             </a:r>
-            <a:endParaRPr lang="en-US" sz="1350" dirty="0"/>
-          </a:p>
-        </p:txBody>
-      </p:sp>
-      <p:sp>
-        <p:nvSpPr>
-          <p:cNvPr id="11" name="Text 8"/>
+            <a:endParaRPr lang="en-US" sz="1400" dirty="0"/>
+          </a:p>
+        </p:txBody>
+      </p:sp>
+      <p:sp>
+        <p:nvSpPr>
+          <p:cNvPr id="9" name="Text 6"/>
           <p:cNvSpPr/>
           <p:nvPr/>
         </p:nvSpPr>
@@ -8311,7 +8311,7 @@
       </p:sp>
       <p:sp>
         <p:nvSpPr>
-          <p:cNvPr id="12" name="Text 9"/>
+          <p:cNvPr id="10" name="Text 7"/>
           <p:cNvSpPr/>
           <p:nvPr/>
         </p:nvSpPr>

--- a/sesion9/Sesion9_Teoria_Preliminar.pptx
+++ b/sesion9/Sesion9_Teoria_Preliminar.pptx
@@ -20,9 +20,10 @@
     <p:sldId id="268" r:id="rId14"/>
     <p:sldId id="269" r:id="rId15"/>
     <p:sldId id="270" r:id="rId16"/>
+    <p:sldId id="271" r:id="rId17"/>
   </p:sldIdLst>
   <p:notesMasterIdLst>
-    <p:notesMasterId r:id="rId17"/>
+    <p:notesMasterId r:id="rId18"/>
   </p:notesMasterIdLst>
   <p:sldSz cx="12191695" cy="6858000"/>
   <p:notesSz cx="6858000" cy="12191695"/>
@@ -1068,6 +1069,94 @@
             <a:fld id="{F7021451-1387-4CA6-816F-3879F97B5CBC}" type="slidenum">
               <a:rPr lang="en-US"/>
               <a:t>15</a:t>
+            </a:fld>
+            <a:endParaRPr lang="en-US"/>
+          </a:p>
+        </p:txBody>
+      </p:sp>
+    </p:spTree>
+    <p:extLst>
+      <p:ext uri="{BB962C8B-B14F-4D97-AF65-F5344CB8AC3E}">
+        <p14:creationId xmlns:p14="http://schemas.microsoft.com/office/powerpoint/2010/main" val="1024086991"/>
+      </p:ext>
+    </p:extLst>
+  </p:cSld>
+  <p:clrMapOvr>
+    <a:masterClrMapping/>
+  </p:clrMapOvr>
+</p:notes>
+</file>
+
+<file path=ppt/notesSlides/notesSlide16.xml><?xml version="1.0" encoding="utf-8"?>
+<p:notes xmlns:a="http://schemas.openxmlformats.org/drawingml/2006/main" xmlns:r="http://schemas.openxmlformats.org/officeDocument/2006/relationships" xmlns:p="http://schemas.openxmlformats.org/presentationml/2006/main">
+  <p:cSld>
+    <p:spTree>
+      <p:nvGrpSpPr>
+        <p:cNvPr id="1" name=""/>
+        <p:cNvGrpSpPr/>
+        <p:nvPr/>
+      </p:nvGrpSpPr>
+      <p:grpSpPr>
+        <a:xfrm>
+          <a:off x="0" y="0"/>
+          <a:ext cx="0" cy="0"/>
+          <a:chOff x="0" y="0"/>
+          <a:chExt cx="0" cy="0"/>
+        </a:xfrm>
+      </p:grpSpPr>
+      <p:sp>
+        <p:nvSpPr>
+          <p:cNvPr id="2" name="Slide Image Placeholder 1"/>
+          <p:cNvSpPr>
+            <a:spLocks noGrp="1" noRot="1" noChangeAspect="1"/>
+          </p:cNvSpPr>
+          <p:nvPr>
+            <p:ph type="sldImg"/>
+          </p:nvPr>
+        </p:nvSpPr>
+        <p:spPr/>
+      </p:sp>
+      <p:sp>
+        <p:nvSpPr>
+          <p:cNvPr id="3" name="Notes Placeholder 2"/>
+          <p:cNvSpPr>
+            <a:spLocks noGrp="1"/>
+          </p:cNvSpPr>
+          <p:nvPr>
+            <p:ph type="body" idx="1"/>
+          </p:nvPr>
+        </p:nvSpPr>
+        <p:spPr/>
+        <p:txBody>
+          <a:bodyPr/>
+          <a:lstStyle/>
+          <a:p>
+            <a:r>
+              <a:rPr lang="en-US" dirty="0"/>
+              <a:t/>
+            </a:r>
+            <a:endParaRPr lang="en-US" dirty="0"/>
+          </a:p>
+        </p:txBody>
+      </p:sp>
+      <p:sp>
+        <p:nvSpPr>
+          <p:cNvPr id="4" name="Slide Number Placeholder 3"/>
+          <p:cNvSpPr>
+            <a:spLocks noGrp="1"/>
+          </p:cNvSpPr>
+          <p:nvPr>
+            <p:ph type="sldNum" sz="quarter" idx="10"/>
+          </p:nvPr>
+        </p:nvSpPr>
+        <p:spPr/>
+        <p:txBody>
+          <a:bodyPr/>
+          <a:lstStyle/>
+          <a:p>
+            <a:fld id="{F7021451-1387-4CA6-816F-3879F97B5CBC}" type="slidenum">
+              <a:rPr lang="en-US"/>
+              <a:t>16</a:t>
             </a:fld>
             <a:endParaRPr lang="en-US"/>
           </a:p>
@@ -2675,7 +2764,7 @@
                 <a:ea typeface="Calibri" pitchFamily="34" charset="-122"/>
                 <a:cs typeface="Calibri" pitchFamily="34" charset="-120"/>
               </a:rPr>
-              <a:t>Ejemplo — Calculando un Wronskiano</a:t>
+              <a:t>Ejemplo — Independencia y Dependencia</a:t>
             </a:r>
             <a:endParaRPr lang="en-US" sz="2900" dirty="0"/>
           </a:p>
@@ -2690,17 +2779,22 @@
         <p:spPr>
           <a:xfrm>
             <a:off x="548640" y="1691640"/>
-            <a:ext cx="11094415" cy="3200400"/>
+            <a:ext cx="5387188" cy="3931920"/>
           </a:xfrm>
           <a:prstGeom prst="roundRect">
             <a:avLst>
-              <a:gd name="adj" fmla="val 2857"/>
+              <a:gd name="adj" fmla="val 1860"/>
             </a:avLst>
           </a:prstGeom>
           <a:solidFill>
-            <a:srgbClr val="1E293B"/>
+            <a:srgbClr val="0E3A44"/>
           </a:solidFill>
-          <a:ln/>
+          <a:ln w="12700">
+            <a:solidFill>
+              <a:srgbClr val="06B6D4"/>
+            </a:solidFill>
+            <a:prstDash val="solid"/>
+          </a:ln>
         </p:spPr>
       </p:sp>
       <p:sp>
@@ -2712,7 +2806,7 @@
         <p:spPr>
           <a:xfrm>
             <a:off x="822960" y="1874520"/>
-            <a:ext cx="10545775" cy="274320"/>
+            <a:ext cx="4838548" cy="320040"/>
           </a:xfrm>
           <a:prstGeom prst="rect">
             <a:avLst/>
@@ -2736,7 +2830,7 @@
                 <a:ea typeface="Calibri" pitchFamily="34" charset="-122"/>
                 <a:cs typeface="Calibri" pitchFamily="34" charset="-120"/>
               </a:rPr>
-              <a:t>SOLUCIONES DE y''−9y=0</a:t>
+              <a:t>INDEPENDIENTES — SOL. DE y''−9y=0</a:t>
             </a:r>
             <a:endParaRPr lang="en-US" sz="1300" dirty="0"/>
           </a:p>
@@ -2758,8 +2852,8 @@
         </p:blipFill>
         <p:spPr>
           <a:xfrm>
-            <a:off x="3848968" y="2240280"/>
-            <a:ext cx="4493759" cy="594360"/>
+            <a:off x="1341028" y="2286000"/>
+            <a:ext cx="3802412" cy="502920"/>
           </a:xfrm>
           <a:prstGeom prst="rect">
             <a:avLst/>
@@ -2774,8 +2868,8 @@
         </p:nvSpPr>
         <p:spPr>
           <a:xfrm>
-            <a:off x="822960" y="2971800"/>
-            <a:ext cx="10545775" cy="320040"/>
+            <a:off x="822960" y="2880360"/>
+            <a:ext cx="4838548" cy="365760"/>
           </a:xfrm>
           <a:prstGeom prst="rect">
             <a:avLst/>
@@ -2794,7 +2888,7 @@
               <a:buNone/>
             </a:pPr>
             <a:r>
-              <a:rPr lang="en-US" sz="1450" dirty="0">
+              <a:rPr lang="en-US" sz="1300" dirty="0">
                 <a:solidFill>
                   <a:srgbClr val="CBD5E1"/>
                 </a:solidFill>
@@ -2804,7 +2898,7 @@
               </a:rPr>
               <a:t>Derivando: y₁'=3e³ˣ, y₂'=−3e⁻³ˣ. El Wronskiano:</a:t>
             </a:r>
-            <a:endParaRPr lang="en-US" sz="1450" dirty="0"/>
+            <a:endParaRPr lang="en-US" sz="1300" dirty="0"/>
           </a:p>
         </p:txBody>
       </p:sp>
@@ -2824,8 +2918,8 @@
         </p:blipFill>
         <p:spPr>
           <a:xfrm>
-            <a:off x="2678278" y="3337560"/>
-            <a:ext cx="6835140" cy="594360"/>
+            <a:off x="822960" y="3332928"/>
+            <a:ext cx="4838548" cy="420743"/>
           </a:xfrm>
           <a:prstGeom prst="rect">
             <a:avLst/>
@@ -2840,8 +2934,8 @@
         </p:nvSpPr>
         <p:spPr>
           <a:xfrm>
-            <a:off x="822960" y="4069080"/>
-            <a:ext cx="10545775" cy="731520"/>
+            <a:off x="822960" y="3886200"/>
+            <a:ext cx="4838548" cy="1371600"/>
           </a:xfrm>
           <a:prstGeom prst="rect">
             <a:avLst/>
@@ -2860,7 +2954,7 @@
               <a:buNone/>
             </a:pPr>
             <a:r>
-              <a:rPr lang="en-US" sz="1350" dirty="0">
+              <a:rPr lang="en-US" sz="1250" dirty="0">
                 <a:solidFill>
                   <a:srgbClr val="CBD5E1"/>
                 </a:solidFill>
@@ -2868,15 +2962,213 @@
                 <a:ea typeface="Calibri" pitchFamily="34" charset="-122"/>
                 <a:cs typeface="Calibri" pitchFamily="34" charset="-120"/>
               </a:rPr>
-              <a:t>Como e³ˣ·e⁻³ˣ=1 para toda x, el resultado es −6 sin importar x — nunca es cero. Son linealmente independientes en toda la recta real: forman un conjunto fundamental de soluciones.</a:t>
-            </a:r>
-            <a:endParaRPr lang="en-US" sz="1350" dirty="0"/>
-          </a:p>
-        </p:txBody>
-      </p:sp>
-      <p:sp>
-        <p:nvSpPr>
-          <p:cNvPr id="10" name="Text 6"/>
+              <a:t>e³ˣ·e⁻³ˣ=1 para toda x, así que W=−6 siempre — nunca cero. Son independientes: forman un conjunto fundamental.</a:t>
+            </a:r>
+            <a:endParaRPr lang="en-US" sz="1250" dirty="0"/>
+          </a:p>
+        </p:txBody>
+      </p:sp>
+      <p:sp>
+        <p:nvSpPr>
+          <p:cNvPr id="10" name="Shape 6"/>
+          <p:cNvSpPr/>
+          <p:nvPr/>
+        </p:nvSpPr>
+        <p:spPr>
+          <a:xfrm>
+            <a:off x="6255868" y="1691640"/>
+            <a:ext cx="5387188" cy="3931920"/>
+          </a:xfrm>
+          <a:prstGeom prst="roundRect">
+            <a:avLst>
+              <a:gd name="adj" fmla="val 1860"/>
+            </a:avLst>
+          </a:prstGeom>
+          <a:solidFill>
+            <a:srgbClr val="3A2A0E"/>
+          </a:solidFill>
+          <a:ln w="12700">
+            <a:solidFill>
+              <a:srgbClr val="F59E0B"/>
+            </a:solidFill>
+            <a:prstDash val="solid"/>
+          </a:ln>
+        </p:spPr>
+      </p:sp>
+      <p:sp>
+        <p:nvSpPr>
+          <p:cNvPr id="11" name="Text 7"/>
+          <p:cNvSpPr/>
+          <p:nvPr/>
+        </p:nvSpPr>
+        <p:spPr>
+          <a:xfrm>
+            <a:off x="6530188" y="1874520"/>
+            <a:ext cx="4838548" cy="320040"/>
+          </a:xfrm>
+          <a:prstGeom prst="rect">
+            <a:avLst/>
+          </a:prstGeom>
+          <a:noFill/>
+          <a:ln/>
+        </p:spPr>
+        <p:txBody>
+          <a:bodyPr wrap="square" lIns="0" tIns="0" rIns="0" bIns="0" rtlCol="0" anchor="t"/>
+          <a:lstStyle/>
+          <a:p>
+            <a:pPr algn="l" indent="0" marL="0">
+              <a:buNone/>
+            </a:pPr>
+            <a:r>
+              <a:rPr lang="en-US" sz="1300" b="1" dirty="0">
+                <a:solidFill>
+                  <a:srgbClr val="FBBF24"/>
+                </a:solidFill>
+                <a:latin typeface="Calibri" pitchFamily="34" charset="0"/>
+                <a:ea typeface="Calibri" pitchFamily="34" charset="-122"/>
+                <a:cs typeface="Calibri" pitchFamily="34" charset="-120"/>
+              </a:rPr>
+              <a:t>DEPENDIENTES — SOL. DE y''−4y'+4y=0</a:t>
+            </a:r>
+            <a:endParaRPr lang="en-US" sz="1300" dirty="0"/>
+          </a:p>
+        </p:txBody>
+      </p:sp>
+      <p:pic>
+        <p:nvPicPr>
+          <p:cNvPr id="12" name="Image 2" descr="build/eq/wronskian_dep_setup.png">    </p:cNvPr>
+          <p:cNvPicPr>
+            <a:picLocks noChangeAspect="1"/>
+          </p:cNvPicPr>
+          <p:nvPr/>
+        </p:nvPicPr>
+        <p:blipFill>
+          <a:blip r:embed="rId3"/>
+          <a:stretch>
+            <a:fillRect/>
+          </a:stretch>
+        </p:blipFill>
+        <p:spPr>
+          <a:xfrm>
+            <a:off x="7056673" y="2286000"/>
+            <a:ext cx="3785578" cy="502920"/>
+          </a:xfrm>
+          <a:prstGeom prst="rect">
+            <a:avLst/>
+          </a:prstGeom>
+        </p:spPr>
+      </p:pic>
+      <p:sp>
+        <p:nvSpPr>
+          <p:cNvPr id="13" name="Text 8"/>
+          <p:cNvSpPr/>
+          <p:nvPr/>
+        </p:nvSpPr>
+        <p:spPr>
+          <a:xfrm>
+            <a:off x="6530188" y="2880360"/>
+            <a:ext cx="4838548" cy="365760"/>
+          </a:xfrm>
+          <a:prstGeom prst="rect">
+            <a:avLst/>
+          </a:prstGeom>
+          <a:noFill/>
+          <a:ln/>
+        </p:spPr>
+        <p:txBody>
+          <a:bodyPr wrap="square" lIns="0" tIns="0" rIns="0" bIns="0" rtlCol="0" anchor="t"/>
+          <a:lstStyle/>
+          <a:p>
+            <a:pPr algn="l" indent="0" marL="0">
+              <a:lnSpc>
+                <a:spcPct val="112000"/>
+              </a:lnSpc>
+              <a:buNone/>
+            </a:pPr>
+            <a:r>
+              <a:rPr lang="en-US" sz="1300" dirty="0">
+                <a:solidFill>
+                  <a:srgbClr val="CBD5E1"/>
+                </a:solidFill>
+                <a:latin typeface="Calibri" pitchFamily="34" charset="0"/>
+                <a:ea typeface="Calibri" pitchFamily="34" charset="-122"/>
+                <a:cs typeface="Calibri" pitchFamily="34" charset="-120"/>
+              </a:rPr>
+              <a:t>Derivando: y₁'=2e²ˣ, y₂'=6e²ˣ. El Wronskiano:</a:t>
+            </a:r>
+            <a:endParaRPr lang="en-US" sz="1300" dirty="0"/>
+          </a:p>
+        </p:txBody>
+      </p:sp>
+      <p:pic>
+        <p:nvPicPr>
+          <p:cNvPr id="14" name="Image 3" descr="build/eq/wronskian_dep_calc.png">    </p:cNvPr>
+          <p:cNvPicPr>
+            <a:picLocks noChangeAspect="1"/>
+          </p:cNvPicPr>
+          <p:nvPr/>
+        </p:nvPicPr>
+        <p:blipFill>
+          <a:blip r:embed="rId4"/>
+          <a:stretch>
+            <a:fillRect/>
+          </a:stretch>
+        </p:blipFill>
+        <p:spPr>
+          <a:xfrm>
+            <a:off x="6530188" y="3300360"/>
+            <a:ext cx="4838548" cy="485879"/>
+          </a:xfrm>
+          <a:prstGeom prst="rect">
+            <a:avLst/>
+          </a:prstGeom>
+        </p:spPr>
+      </p:pic>
+      <p:sp>
+        <p:nvSpPr>
+          <p:cNvPr id="15" name="Text 9"/>
+          <p:cNvSpPr/>
+          <p:nvPr/>
+        </p:nvSpPr>
+        <p:spPr>
+          <a:xfrm>
+            <a:off x="6530188" y="3886200"/>
+            <a:ext cx="4838548" cy="1371600"/>
+          </a:xfrm>
+          <a:prstGeom prst="rect">
+            <a:avLst/>
+          </a:prstGeom>
+          <a:noFill/>
+          <a:ln/>
+        </p:spPr>
+        <p:txBody>
+          <a:bodyPr wrap="square" lIns="0" tIns="0" rIns="0" bIns="0" rtlCol="0" anchor="t"/>
+          <a:lstStyle/>
+          <a:p>
+            <a:pPr algn="l" indent="0" marL="0">
+              <a:lnSpc>
+                <a:spcPct val="112000"/>
+              </a:lnSpc>
+              <a:buNone/>
+            </a:pPr>
+            <a:r>
+              <a:rPr lang="en-US" sz="1250" dirty="0">
+                <a:solidFill>
+                  <a:srgbClr val="CBD5E1"/>
+                </a:solidFill>
+                <a:latin typeface="Calibri" pitchFamily="34" charset="0"/>
+                <a:ea typeface="Calibri" pitchFamily="34" charset="-122"/>
+                <a:cs typeface="Calibri" pitchFamily="34" charset="-120"/>
+              </a:rPr>
+              <a:t>W=0 para toda x. De hecho y₂=3y₁ — son múltiplos, dependientes. No forman un conjunto fundamental.</a:t>
+            </a:r>
+            <a:endParaRPr lang="en-US" sz="1250" dirty="0"/>
+          </a:p>
+        </p:txBody>
+      </p:sp>
+      <p:sp>
+        <p:nvSpPr>
+          <p:cNvPr id="16" name="Text 10"/>
           <p:cNvSpPr/>
           <p:nvPr/>
         </p:nvSpPr>
@@ -2915,7 +3207,7 @@
       </p:sp>
       <p:sp>
         <p:nvSpPr>
-          <p:cNvPr id="11" name="Text 7"/>
+          <p:cNvPr id="17" name="Text 11"/>
           <p:cNvSpPr/>
           <p:nvPr/>
         </p:nvSpPr>
@@ -3070,12 +3362,81 @@
         </p:nvSpPr>
         <p:spPr>
           <a:xfrm>
-            <a:off x="548640" y="1691640"/>
-            <a:ext cx="11094415" cy="1371600"/>
+            <a:off x="548640" y="1600200"/>
+            <a:ext cx="11094415" cy="914400"/>
           </a:xfrm>
           <a:prstGeom prst="roundRect">
             <a:avLst>
-              <a:gd name="adj" fmla="val 5333"/>
+              <a:gd name="adj" fmla="val 8000"/>
+            </a:avLst>
+          </a:prstGeom>
+          <a:solidFill>
+            <a:srgbClr val="2E2350"/>
+          </a:solidFill>
+          <a:ln w="12700">
+            <a:solidFill>
+              <a:srgbClr val="8B5CF6"/>
+            </a:solidFill>
+            <a:prstDash val="solid"/>
+          </a:ln>
+        </p:spPr>
+      </p:sp>
+      <p:sp>
+        <p:nvSpPr>
+          <p:cNvPr id="5" name="Text 3"/>
+          <p:cNvSpPr/>
+          <p:nvPr/>
+        </p:nvSpPr>
+        <p:spPr>
+          <a:xfrm>
+            <a:off x="777240" y="1600200"/>
+            <a:ext cx="10637215" cy="914400"/>
+          </a:xfrm>
+          <a:prstGeom prst="rect">
+            <a:avLst/>
+          </a:prstGeom>
+          <a:noFill/>
+          <a:ln/>
+        </p:spPr>
+        <p:txBody>
+          <a:bodyPr wrap="square" lIns="0" tIns="0" rIns="0" bIns="0" rtlCol="0" anchor="ctr"/>
+          <a:lstStyle/>
+          <a:p>
+            <a:pPr algn="l" indent="0" marL="0">
+              <a:lnSpc>
+                <a:spcPct val="115000"/>
+              </a:lnSpc>
+              <a:buNone/>
+            </a:pPr>
+            <a:r>
+              <a:rPr lang="en-US" sz="1300" b="1" dirty="0">
+                <a:solidFill>
+                  <a:srgbClr val="A78BFA"/>
+                </a:solidFill>
+                <a:latin typeface="Calibri" pitchFamily="34" charset="0"/>
+                <a:ea typeface="Calibri" pitchFamily="34" charset="-122"/>
+                <a:cs typeface="Calibri" pitchFamily="34" charset="-120"/>
+              </a:rPr>
+              <a:t>↔ vs. Diapositiva 7: ahí, superposición solo garantizaba que las combinaciones siguieran siendo solución (cierre). Aquí, gracias a la independencia lineal y contar exactamente n, esas combinaciones agotan TODAS las soluciones (completitud).</a:t>
+            </a:r>
+            <a:endParaRPr lang="en-US" sz="1300" dirty="0"/>
+          </a:p>
+        </p:txBody>
+      </p:sp>
+      <p:sp>
+        <p:nvSpPr>
+          <p:cNvPr id="6" name="Shape 4"/>
+          <p:cNvSpPr/>
+          <p:nvPr/>
+        </p:nvSpPr>
+        <p:spPr>
+          <a:xfrm>
+            <a:off x="548640" y="2606040"/>
+            <a:ext cx="11094415" cy="1051560"/>
+          </a:xfrm>
+          <a:prstGeom prst="roundRect">
+            <a:avLst>
+              <a:gd name="adj" fmla="val 6957"/>
             </a:avLst>
           </a:prstGeom>
           <a:solidFill>
@@ -3091,7 +3452,7 @@
       </p:sp>
       <p:pic>
         <p:nvPicPr>
-          <p:cNvPr id="5" name="Image 0" descr="build/eq/general_solution.png">    </p:cNvPr>
+          <p:cNvPr id="7" name="Image 0" descr="build/eq/general_solution.png">    </p:cNvPr>
           <p:cNvPicPr>
             <a:picLocks noChangeAspect="1"/>
           </p:cNvPicPr>
@@ -3105,8 +3466,8 @@
         </p:blipFill>
         <p:spPr>
           <a:xfrm>
-            <a:off x="822960" y="1869746"/>
-            <a:ext cx="10545775" cy="1015387"/>
+            <a:off x="2059654" y="2743200"/>
+            <a:ext cx="8072387" cy="777240"/>
           </a:xfrm>
           <a:prstGeom prst="rect">
             <a:avLst/>
@@ -3115,14 +3476,14 @@
       </p:pic>
       <p:sp>
         <p:nvSpPr>
-          <p:cNvPr id="6" name="Text 3"/>
-          <p:cNvSpPr/>
-          <p:nvPr/>
-        </p:nvSpPr>
-        <p:spPr>
-          <a:xfrm>
-            <a:off x="548640" y="3337560"/>
-            <a:ext cx="11094415" cy="731520"/>
+          <p:cNvPr id="8" name="Text 5"/>
+          <p:cNvSpPr/>
+          <p:nvPr/>
+        </p:nvSpPr>
+        <p:spPr>
+          <a:xfrm>
+            <a:off x="548640" y="3794760"/>
+            <a:ext cx="11094415" cy="640080"/>
           </a:xfrm>
           <a:prstGeom prst="rect">
             <a:avLst/>
@@ -3141,7 +3502,7 @@
               <a:buNone/>
             </a:pPr>
             <a:r>
-              <a:rPr lang="en-US" sz="1500" dirty="0">
+              <a:rPr lang="en-US" sz="1400" dirty="0">
                 <a:solidFill>
                   <a:srgbClr val="CBD5E1"/>
                 </a:solidFill>
@@ -3151,24 +3512,24 @@
               </a:rPr>
               <a:t>Un conjunto fundamental de soluciones de una ED lineal homogénea de orden n es exactamente eso: n soluciones, linealmente independientes entre sí, de esa misma ecuación.</a:t>
             </a:r>
-            <a:endParaRPr lang="en-US" sz="1500" dirty="0"/>
-          </a:p>
-        </p:txBody>
-      </p:sp>
-      <p:sp>
-        <p:nvSpPr>
-          <p:cNvPr id="7" name="Shape 4"/>
-          <p:cNvSpPr/>
-          <p:nvPr/>
-        </p:nvSpPr>
-        <p:spPr>
-          <a:xfrm>
-            <a:off x="548640" y="4251960"/>
-            <a:ext cx="11094415" cy="868680"/>
+            <a:endParaRPr lang="en-US" sz="1400" dirty="0"/>
+          </a:p>
+        </p:txBody>
+      </p:sp>
+      <p:sp>
+        <p:nvSpPr>
+          <p:cNvPr id="9" name="Shape 6"/>
+          <p:cNvSpPr/>
+          <p:nvPr/>
+        </p:nvSpPr>
+        <p:spPr>
+          <a:xfrm>
+            <a:off x="548640" y="4526280"/>
+            <a:ext cx="11094415" cy="777240"/>
           </a:xfrm>
           <a:prstGeom prst="roundRect">
             <a:avLst>
-              <a:gd name="adj" fmla="val 8421"/>
+              <a:gd name="adj" fmla="val 9412"/>
             </a:avLst>
           </a:prstGeom>
           <a:solidFill>
@@ -3184,14 +3545,14 @@
       </p:sp>
       <p:sp>
         <p:nvSpPr>
-          <p:cNvPr id="8" name="Text 5"/>
-          <p:cNvSpPr/>
-          <p:nvPr/>
-        </p:nvSpPr>
-        <p:spPr>
-          <a:xfrm>
-            <a:off x="777240" y="4251960"/>
-            <a:ext cx="10637215" cy="868680"/>
+          <p:cNvPr id="10" name="Text 7"/>
+          <p:cNvSpPr/>
+          <p:nvPr/>
+        </p:nvSpPr>
+        <p:spPr>
+          <a:xfrm>
+            <a:off x="777240" y="4526280"/>
+            <a:ext cx="10637215" cy="777240"/>
           </a:xfrm>
           <a:prstGeom prst="rect">
             <a:avLst/>
@@ -3210,7 +3571,7 @@
               <a:buNone/>
             </a:pPr>
             <a:r>
-              <a:rPr lang="en-US" sz="1400" b="1" dirty="0">
+              <a:rPr lang="en-US" sz="1350" b="1" dirty="0">
                 <a:solidFill>
                   <a:srgbClr val="34D399"/>
                 </a:solidFill>
@@ -3220,13 +3581,13 @@
               </a:rPr>
               <a:t>Si y₁,…,yₙ es un conjunto fundamental, esta combinación ES la solución general — combina todas las soluciones posibles, ninguna se les escapa.</a:t>
             </a:r>
-            <a:endParaRPr lang="en-US" sz="1400" dirty="0"/>
-          </a:p>
-        </p:txBody>
-      </p:sp>
-      <p:sp>
-        <p:nvSpPr>
-          <p:cNvPr id="9" name="Text 6"/>
+            <a:endParaRPr lang="en-US" sz="1350" dirty="0"/>
+          </a:p>
+        </p:txBody>
+      </p:sp>
+      <p:sp>
+        <p:nvSpPr>
+          <p:cNvPr id="11" name="Text 8"/>
           <p:cNvSpPr/>
           <p:nvPr/>
         </p:nvSpPr>
@@ -3265,7 +3626,7 @@
       </p:sp>
       <p:sp>
         <p:nvSpPr>
-          <p:cNvPr id="10" name="Text 7"/>
+          <p:cNvPr id="12" name="Text 9"/>
           <p:cNvSpPr/>
           <p:nvPr/>
         </p:nvSpPr>
@@ -3870,12 +4231,12 @@
         </p:nvSpPr>
         <p:spPr>
           <a:xfrm>
-            <a:off x="548640" y="1737360"/>
-            <a:ext cx="11094415" cy="1737360"/>
+            <a:off x="548640" y="1600200"/>
+            <a:ext cx="11094415" cy="1371600"/>
           </a:xfrm>
           <a:prstGeom prst="roundRect">
             <a:avLst>
-              <a:gd name="adj" fmla="val 5263"/>
+              <a:gd name="adj" fmla="val 6667"/>
             </a:avLst>
           </a:prstGeom>
           <a:solidFill>
@@ -3892,8 +4253,8 @@
         </p:nvSpPr>
         <p:spPr>
           <a:xfrm>
-            <a:off x="914400" y="1965960"/>
-            <a:ext cx="10362895" cy="1371600"/>
+            <a:off x="914400" y="1828800"/>
+            <a:ext cx="10362895" cy="1051560"/>
           </a:xfrm>
           <a:prstGeom prst="rect">
             <a:avLst/>
@@ -3912,7 +4273,7 @@
               <a:buNone/>
             </a:pPr>
             <a:r>
-              <a:rPr lang="en-US" sz="1700" dirty="0">
+              <a:rPr lang="en-US" sz="1600" dirty="0">
                 <a:solidFill>
                   <a:srgbClr val="F8FAFC"/>
                 </a:solidFill>
@@ -3922,7 +4283,7 @@
               </a:rPr>
               <a:t>Si yₚ₁ es solución particular cuando el lado derecho es g₁(x), y yₚ₂ es solución particular cuando el lado derecho es g₂(x), entonces yₚ₁+yₚ₂ es solución particular cuando el lado derecho es g₁(x)+g₂(x).</a:t>
             </a:r>
-            <a:endParaRPr lang="en-US" sz="1700" dirty="0"/>
+            <a:endParaRPr lang="en-US" sz="1600" dirty="0"/>
           </a:p>
         </p:txBody>
       </p:sp>
@@ -3934,12 +4295,81 @@
         </p:nvSpPr>
         <p:spPr>
           <a:xfrm>
-            <a:off x="548640" y="3749040"/>
-            <a:ext cx="11094415" cy="1051560"/>
+            <a:off x="548640" y="3108960"/>
+            <a:ext cx="11094415" cy="914400"/>
           </a:xfrm>
           <a:prstGeom prst="roundRect">
             <a:avLst>
-              <a:gd name="adj" fmla="val 6957"/>
+              <a:gd name="adj" fmla="val 8000"/>
+            </a:avLst>
+          </a:prstGeom>
+          <a:solidFill>
+            <a:srgbClr val="0E3A44"/>
+          </a:solidFill>
+          <a:ln w="12700">
+            <a:solidFill>
+              <a:srgbClr val="06B6D4"/>
+            </a:solidFill>
+            <a:prstDash val="solid"/>
+          </a:ln>
+        </p:spPr>
+      </p:sp>
+      <p:sp>
+        <p:nvSpPr>
+          <p:cNvPr id="7" name="Text 5"/>
+          <p:cNvSpPr/>
+          <p:nvPr/>
+        </p:nvSpPr>
+        <p:spPr>
+          <a:xfrm>
+            <a:off x="822960" y="3246120"/>
+            <a:ext cx="10545775" cy="640080"/>
+          </a:xfrm>
+          <a:prstGeom prst="rect">
+            <a:avLst/>
+          </a:prstGeom>
+          <a:noFill/>
+          <a:ln/>
+        </p:spPr>
+        <p:txBody>
+          <a:bodyPr wrap="square" lIns="0" tIns="0" rIns="0" bIns="0" rtlCol="0" anchor="t"/>
+          <a:lstStyle/>
+          <a:p>
+            <a:pPr algn="l" indent="0" marL="0">
+              <a:lnSpc>
+                <a:spcPct val="112000"/>
+              </a:lnSpc>
+              <a:buNone/>
+            </a:pPr>
+            <a:r>
+              <a:rPr lang="en-US" sz="1350" dirty="0">
+                <a:solidFill>
+                  <a:srgbClr val="CBD5E1"/>
+                </a:solidFill>
+                <a:latin typeface="Calibri" pitchFamily="34" charset="0"/>
+                <a:ea typeface="Calibri" pitchFamily="34" charset="-122"/>
+                <a:cs typeface="Calibri" pitchFamily="34" charset="-120"/>
+              </a:rPr>
+              <a:t>A g(x) también le dicen "forzamiento" o "función forzante" — mismo concepto. Ejemplo: si g(x)=x²+e³ˣ, resuelven yₚ₁ para g₁=x², yₚ₂ para g₂=e³ˣ, y arman yₚ=yₚ₁+yₚ₂.</a:t>
+            </a:r>
+            <a:endParaRPr lang="en-US" sz="1350" dirty="0"/>
+          </a:p>
+        </p:txBody>
+      </p:sp>
+      <p:sp>
+        <p:nvSpPr>
+          <p:cNvPr id="8" name="Shape 6"/>
+          <p:cNvSpPr/>
+          <p:nvPr/>
+        </p:nvSpPr>
+        <p:spPr>
+          <a:xfrm>
+            <a:off x="548640" y="4160520"/>
+            <a:ext cx="11094415" cy="777240"/>
+          </a:xfrm>
+          <a:prstGeom prst="roundRect">
+            <a:avLst>
+              <a:gd name="adj" fmla="val 9412"/>
             </a:avLst>
           </a:prstGeom>
           <a:solidFill>
@@ -3955,14 +4385,14 @@
       </p:sp>
       <p:sp>
         <p:nvSpPr>
-          <p:cNvPr id="7" name="Text 5"/>
-          <p:cNvSpPr/>
-          <p:nvPr/>
-        </p:nvSpPr>
-        <p:spPr>
-          <a:xfrm>
-            <a:off x="777240" y="3749040"/>
-            <a:ext cx="10637215" cy="1051560"/>
+          <p:cNvPr id="9" name="Text 7"/>
+          <p:cNvSpPr/>
+          <p:nvPr/>
+        </p:nvSpPr>
+        <p:spPr>
+          <a:xfrm>
+            <a:off x="777240" y="4160520"/>
+            <a:ext cx="10637215" cy="777240"/>
           </a:xfrm>
           <a:prstGeom prst="rect">
             <a:avLst/>
@@ -3981,7 +4411,7 @@
               <a:buNone/>
             </a:pPr>
             <a:r>
-              <a:rPr lang="en-US" sz="1450" b="1" dirty="0">
+              <a:rPr lang="en-US" sz="1350" b="1" dirty="0">
                 <a:solidFill>
                   <a:srgbClr val="A78BFA"/>
                 </a:solidFill>
@@ -3989,15 +4419,15 @@
                 <a:ea typeface="Calibri" pitchFamily="34" charset="-122"/>
                 <a:cs typeface="Calibri" pitchFamily="34" charset="-120"/>
               </a:rPr>
-              <a:t>Si el forzamiento tiene varios términos distintos, resuelven cada uno por separado y suman. Esa es exactamente la lógica detrás del método del anulador que aprenden en la Sesión 10.</a:t>
-            </a:r>
-            <a:endParaRPr lang="en-US" sz="1450" dirty="0"/>
-          </a:p>
-        </p:txBody>
-      </p:sp>
-      <p:sp>
-        <p:nvSpPr>
-          <p:cNvPr id="8" name="Text 6"/>
+              <a:t>Si el forzamiento tiene varios términos distintos, resuelven cada uno por separado y suman — esa es la lógica exacta del método del anulador que aprenden en la Sesión 10.</a:t>
+            </a:r>
+            <a:endParaRPr lang="en-US" sz="1350" dirty="0"/>
+          </a:p>
+        </p:txBody>
+      </p:sp>
+      <p:sp>
+        <p:nvSpPr>
+          <p:cNvPr id="10" name="Text 8"/>
           <p:cNvSpPr/>
           <p:nvPr/>
         </p:nvSpPr>
@@ -4036,7 +4466,7 @@
       </p:sp>
       <p:sp>
         <p:nvSpPr>
-          <p:cNvPr id="9" name="Text 7"/>
+          <p:cNvPr id="11" name="Text 9"/>
           <p:cNvSpPr/>
           <p:nvPr/>
         </p:nvSpPr>
@@ -4963,29 +5393,7 @@
       </p:grpSpPr>
       <p:sp>
         <p:nvSpPr>
-          <p:cNvPr id="2" name="Shape 0"/>
-          <p:cNvSpPr/>
-          <p:nvPr/>
-        </p:nvSpPr>
-        <p:spPr>
-          <a:xfrm>
-            <a:off x="-1097280" y="4114800"/>
-            <a:ext cx="4023360" cy="4023360"/>
-          </a:xfrm>
-          <a:prstGeom prst="ellipse">
-            <a:avLst/>
-          </a:prstGeom>
-          <a:solidFill>
-            <a:srgbClr val="06B6D4">
-              <a:alpha val="10000"/>
-            </a:srgbClr>
-          </a:solidFill>
-          <a:ln/>
-        </p:spPr>
-      </p:sp>
-      <p:sp>
-        <p:nvSpPr>
-          <p:cNvPr id="3" name="Text 1"/>
+          <p:cNvPr id="2" name="Text 0"/>
           <p:cNvSpPr/>
           <p:nvPr/>
         </p:nvSpPr>
@@ -5024,7 +5432,7 @@
       </p:sp>
       <p:sp>
         <p:nvSpPr>
-          <p:cNvPr id="4" name="Text 2"/>
+          <p:cNvPr id="3" name="Text 1"/>
           <p:cNvSpPr/>
           <p:nvPr/>
         </p:nvSpPr>
@@ -5063,7 +5471,7 @@
       </p:sp>
       <p:sp>
         <p:nvSpPr>
-          <p:cNvPr id="5" name="Shape 3"/>
+          <p:cNvPr id="4" name="Shape 2"/>
           <p:cNvSpPr/>
           <p:nvPr/>
         </p:nvSpPr>
@@ -5085,7 +5493,7 @@
       </p:sp>
       <p:sp>
         <p:nvSpPr>
-          <p:cNvPr id="6" name="Text 4"/>
+          <p:cNvPr id="5" name="Text 3"/>
           <p:cNvSpPr/>
           <p:nvPr/>
         </p:nvSpPr>
@@ -5124,7 +5532,7 @@
       </p:sp>
       <p:sp>
         <p:nvSpPr>
-          <p:cNvPr id="7" name="Shape 5"/>
+          <p:cNvPr id="6" name="Shape 4"/>
           <p:cNvSpPr/>
           <p:nvPr/>
         </p:nvSpPr>
@@ -5146,7 +5554,7 @@
       </p:sp>
       <p:sp>
         <p:nvSpPr>
-          <p:cNvPr id="8" name="Text 6"/>
+          <p:cNvPr id="7" name="Text 5"/>
           <p:cNvSpPr/>
           <p:nvPr/>
         </p:nvSpPr>
@@ -5185,7 +5593,7 @@
       </p:sp>
       <p:sp>
         <p:nvSpPr>
-          <p:cNvPr id="9" name="Shape 7"/>
+          <p:cNvPr id="8" name="Shape 6"/>
           <p:cNvSpPr/>
           <p:nvPr/>
         </p:nvSpPr>
@@ -5207,7 +5615,7 @@
       </p:sp>
       <p:sp>
         <p:nvSpPr>
-          <p:cNvPr id="10" name="Text 8"/>
+          <p:cNvPr id="9" name="Text 7"/>
           <p:cNvSpPr/>
           <p:nvPr/>
         </p:nvSpPr>
@@ -5246,7 +5654,7 @@
       </p:sp>
       <p:sp>
         <p:nvSpPr>
-          <p:cNvPr id="11" name="Shape 9"/>
+          <p:cNvPr id="10" name="Shape 8"/>
           <p:cNvSpPr/>
           <p:nvPr/>
         </p:nvSpPr>
@@ -5268,7 +5676,7 @@
       </p:sp>
       <p:sp>
         <p:nvSpPr>
-          <p:cNvPr id="12" name="Text 10"/>
+          <p:cNvPr id="11" name="Text 9"/>
           <p:cNvSpPr/>
           <p:nvPr/>
         </p:nvSpPr>
@@ -5307,7 +5715,7 @@
       </p:sp>
       <p:sp>
         <p:nvSpPr>
-          <p:cNvPr id="13" name="Shape 11"/>
+          <p:cNvPr id="12" name="Shape 10"/>
           <p:cNvSpPr/>
           <p:nvPr/>
         </p:nvSpPr>
@@ -5334,7 +5742,7 @@
       </p:sp>
       <p:sp>
         <p:nvSpPr>
-          <p:cNvPr id="14" name="Text 12"/>
+          <p:cNvPr id="13" name="Text 11"/>
           <p:cNvSpPr/>
           <p:nvPr/>
         </p:nvSpPr>
@@ -5376,7 +5784,7 @@
       </p:sp>
       <p:sp>
         <p:nvSpPr>
-          <p:cNvPr id="15" name="Shape 13"/>
+          <p:cNvPr id="14" name="Shape 12"/>
           <p:cNvSpPr/>
           <p:nvPr/>
         </p:nvSpPr>
@@ -5403,7 +5811,7 @@
       </p:sp>
       <p:sp>
         <p:nvSpPr>
-          <p:cNvPr id="16" name="Text 14"/>
+          <p:cNvPr id="15" name="Text 13"/>
           <p:cNvSpPr/>
           <p:nvPr/>
         </p:nvSpPr>
@@ -5442,14 +5850,14 @@
       </p:sp>
       <p:sp>
         <p:nvSpPr>
-          <p:cNvPr id="17" name="Text 15"/>
+          <p:cNvPr id="16" name="Text 14"/>
           <p:cNvSpPr/>
           <p:nvPr/>
         </p:nvSpPr>
         <p:spPr>
           <a:xfrm>
             <a:off x="914400" y="4251960"/>
-            <a:ext cx="10362895" cy="822960"/>
+            <a:ext cx="10362895" cy="960120"/>
           </a:xfrm>
           <a:prstGeom prst="rect">
             <a:avLst/>
@@ -5476,7 +5884,7 @@
                 <a:ea typeface="Calibri" pitchFamily="34" charset="-122"/>
                 <a:cs typeface="Calibri" pitchFamily="34" charset="-120"/>
               </a:rPr>
-              <a:t>Van a fabricar, de forma completamente mecánica, conjuntos fundamentales de soluciones para ecuaciones con coeficientes constantes — y van a resolver su primer caso real con valores en la frontera.</a:t>
+              <a:t>Van a fabricar, de forma completamente mecánica, conjuntos fundamentales de soluciones para ecuaciones con coeficientes constantes — y van a resolver su primer caso real con valores en la frontera. Antes de eso, tienen una tarea corta — siguiente diapositiva.</a:t>
             </a:r>
             <a:endParaRPr lang="en-US" sz="1300" dirty="0"/>
           </a:p>
@@ -5484,7 +5892,7 @@
       </p:sp>
       <p:sp>
         <p:nvSpPr>
-          <p:cNvPr id="18" name="Text 16"/>
+          <p:cNvPr id="17" name="Text 15"/>
           <p:cNvSpPr/>
           <p:nvPr/>
         </p:nvSpPr>
@@ -5523,7 +5931,7 @@
       </p:sp>
       <p:sp>
         <p:nvSpPr>
-          <p:cNvPr id="19" name="Text 17"/>
+          <p:cNvPr id="18" name="Text 16"/>
           <p:cNvSpPr/>
           <p:nvPr/>
         </p:nvSpPr>
@@ -5555,6 +5963,795 @@
                 <a:cs typeface="Calibri" pitchFamily="34" charset="-120"/>
               </a:rPr>
               <a:t>15</a:t>
+            </a:r>
+            <a:endParaRPr lang="en-US" sz="900" dirty="0"/>
+          </a:p>
+        </p:txBody>
+      </p:sp>
+    </p:spTree>
+  </p:cSld>
+  <p:clrMapOvr>
+    <a:masterClrMapping/>
+  </p:clrMapOvr>
+</p:sld>
+</file>
+
+<file path=ppt/slides/slide16.xml><?xml version="1.0" encoding="utf-8"?>
+<p:sld xmlns:a="http://schemas.openxmlformats.org/drawingml/2006/main" xmlns:r="http://schemas.openxmlformats.org/officeDocument/2006/relationships" xmlns:p="http://schemas.openxmlformats.org/presentationml/2006/main">
+  <p:cSld name="Slide 16">
+    <p:bg>
+      <p:bgPr>
+        <a:solidFill>
+          <a:srgbClr val="0B0F19"/>
+        </a:solidFill>
+      </p:bgPr>
+    </p:bg>
+    <p:spTree>
+      <p:nvGrpSpPr>
+        <p:cNvPr id="1" name=""/>
+        <p:cNvGrpSpPr/>
+        <p:nvPr/>
+      </p:nvGrpSpPr>
+      <p:grpSpPr>
+        <a:xfrm>
+          <a:off x="0" y="0"/>
+          <a:ext cx="0" cy="0"/>
+          <a:chOff x="0" y="0"/>
+          <a:chExt cx="0" cy="0"/>
+        </a:xfrm>
+      </p:grpSpPr>
+      <p:sp>
+        <p:nvSpPr>
+          <p:cNvPr id="2" name="Shape 0"/>
+          <p:cNvSpPr/>
+          <p:nvPr/>
+        </p:nvSpPr>
+        <p:spPr>
+          <a:xfrm>
+            <a:off x="-1097280" y="4114800"/>
+            <a:ext cx="4023360" cy="4023360"/>
+          </a:xfrm>
+          <a:prstGeom prst="ellipse">
+            <a:avLst/>
+          </a:prstGeom>
+          <a:solidFill>
+            <a:srgbClr val="06B6D4">
+              <a:alpha val="10000"/>
+            </a:srgbClr>
+          </a:solidFill>
+          <a:ln/>
+        </p:spPr>
+      </p:sp>
+      <p:sp>
+        <p:nvSpPr>
+          <p:cNvPr id="3" name="Text 1"/>
+          <p:cNvSpPr/>
+          <p:nvPr/>
+        </p:nvSpPr>
+        <p:spPr>
+          <a:xfrm>
+            <a:off x="548640" y="365760"/>
+            <a:ext cx="11094415" cy="274320"/>
+          </a:xfrm>
+          <a:prstGeom prst="rect">
+            <a:avLst/>
+          </a:prstGeom>
+          <a:noFill/>
+          <a:ln/>
+        </p:spPr>
+        <p:txBody>
+          <a:bodyPr wrap="square" lIns="0" tIns="0" rIns="0" bIns="0" rtlCol="0" anchor="ctr"/>
+          <a:lstStyle/>
+          <a:p>
+            <a:pPr indent="0" marL="0">
+              <a:buNone/>
+            </a:pPr>
+            <a:r>
+              <a:rPr lang="en-US" sz="1300" b="1" spc="150" kern="0" dirty="0">
+                <a:solidFill>
+                  <a:srgbClr val="22D3EE"/>
+                </a:solidFill>
+                <a:latin typeface="Calibri" pitchFamily="34" charset="0"/>
+                <a:ea typeface="Calibri" pitchFamily="34" charset="-122"/>
+                <a:cs typeface="Calibri" pitchFamily="34" charset="-120"/>
+              </a:rPr>
+              <a:t>ANTES DE LA PRÓXIMA CLASE</a:t>
+            </a:r>
+            <a:endParaRPr lang="en-US" sz="1300" dirty="0"/>
+          </a:p>
+        </p:txBody>
+      </p:sp>
+      <p:sp>
+        <p:nvSpPr>
+          <p:cNvPr id="4" name="Text 2"/>
+          <p:cNvSpPr/>
+          <p:nvPr/>
+        </p:nvSpPr>
+        <p:spPr>
+          <a:xfrm>
+            <a:off x="548640" y="640080"/>
+            <a:ext cx="11094415" cy="548640"/>
+          </a:xfrm>
+          <a:prstGeom prst="rect">
+            <a:avLst/>
+          </a:prstGeom>
+          <a:noFill/>
+          <a:ln/>
+        </p:spPr>
+        <p:txBody>
+          <a:bodyPr wrap="square" lIns="0" tIns="0" rIns="0" bIns="0" rtlCol="0" anchor="ctr"/>
+          <a:lstStyle/>
+          <a:p>
+            <a:pPr indent="0" marL="0">
+              <a:buNone/>
+            </a:pPr>
+            <a:r>
+              <a:rPr lang="en-US" sz="2900" b="1" dirty="0">
+                <a:solidFill>
+                  <a:srgbClr val="F8FAFC"/>
+                </a:solidFill>
+                <a:latin typeface="Calibri" pitchFamily="34" charset="0"/>
+                <a:ea typeface="Calibri" pitchFamily="34" charset="-122"/>
+                <a:cs typeface="Calibri" pitchFamily="34" charset="-120"/>
+              </a:rPr>
+              <a:t>Tarea: Operadores Diferenciales</a:t>
+            </a:r>
+            <a:endParaRPr lang="en-US" sz="2900" dirty="0"/>
+          </a:p>
+        </p:txBody>
+      </p:sp>
+      <p:sp>
+        <p:nvSpPr>
+          <p:cNvPr id="5" name="Shape 3"/>
+          <p:cNvSpPr/>
+          <p:nvPr/>
+        </p:nvSpPr>
+        <p:spPr>
+          <a:xfrm>
+            <a:off x="548640" y="1691640"/>
+            <a:ext cx="3515258" cy="2377440"/>
+          </a:xfrm>
+          <a:prstGeom prst="roundRect">
+            <a:avLst>
+              <a:gd name="adj" fmla="val 3846"/>
+            </a:avLst>
+          </a:prstGeom>
+          <a:solidFill>
+            <a:srgbClr val="1E293B"/>
+          </a:solidFill>
+          <a:ln/>
+        </p:spPr>
+      </p:sp>
+      <p:sp>
+        <p:nvSpPr>
+          <p:cNvPr id="6" name="Shape 4"/>
+          <p:cNvSpPr/>
+          <p:nvPr/>
+        </p:nvSpPr>
+        <p:spPr>
+          <a:xfrm>
+            <a:off x="777240" y="1874520"/>
+            <a:ext cx="384048" cy="384048"/>
+          </a:xfrm>
+          <a:prstGeom prst="ellipse">
+            <a:avLst/>
+          </a:prstGeom>
+          <a:solidFill>
+            <a:srgbClr val="0B0F19"/>
+          </a:solidFill>
+          <a:ln w="25400">
+            <a:solidFill>
+              <a:srgbClr val="22D3EE"/>
+            </a:solidFill>
+            <a:prstDash val="solid"/>
+          </a:ln>
+        </p:spPr>
+      </p:sp>
+      <p:sp>
+        <p:nvSpPr>
+          <p:cNvPr id="7" name="Text 5"/>
+          <p:cNvSpPr/>
+          <p:nvPr/>
+        </p:nvSpPr>
+        <p:spPr>
+          <a:xfrm>
+            <a:off x="777240" y="1874520"/>
+            <a:ext cx="384048" cy="384048"/>
+          </a:xfrm>
+          <a:prstGeom prst="rect">
+            <a:avLst/>
+          </a:prstGeom>
+          <a:noFill/>
+          <a:ln/>
+        </p:spPr>
+        <p:txBody>
+          <a:bodyPr wrap="square" lIns="0" tIns="0" rIns="0" bIns="0" rtlCol="0" anchor="ctr"/>
+          <a:lstStyle/>
+          <a:p>
+            <a:pPr algn="ctr" indent="0" marL="0">
+              <a:buNone/>
+            </a:pPr>
+            <a:r>
+              <a:rPr lang="en-US" sz="1600" b="1" dirty="0">
+                <a:solidFill>
+                  <a:srgbClr val="22D3EE"/>
+                </a:solidFill>
+                <a:latin typeface="Calibri" pitchFamily="34" charset="0"/>
+                <a:ea typeface="Calibri" pitchFamily="34" charset="-122"/>
+                <a:cs typeface="Calibri" pitchFamily="34" charset="-120"/>
+              </a:rPr>
+              <a:t>1</a:t>
+            </a:r>
+            <a:endParaRPr lang="en-US" sz="1600" dirty="0"/>
+          </a:p>
+        </p:txBody>
+      </p:sp>
+      <p:sp>
+        <p:nvSpPr>
+          <p:cNvPr id="8" name="Text 6"/>
+          <p:cNvSpPr/>
+          <p:nvPr/>
+        </p:nvSpPr>
+        <p:spPr>
+          <a:xfrm>
+            <a:off x="1280160" y="1874520"/>
+            <a:ext cx="2555138" cy="384048"/>
+          </a:xfrm>
+          <a:prstGeom prst="rect">
+            <a:avLst/>
+          </a:prstGeom>
+          <a:noFill/>
+          <a:ln/>
+        </p:spPr>
+        <p:txBody>
+          <a:bodyPr wrap="square" lIns="0" tIns="0" rIns="0" bIns="0" rtlCol="0" anchor="ctr"/>
+          <a:lstStyle/>
+          <a:p>
+            <a:pPr indent="0" marL="0">
+              <a:lnSpc>
+                <a:spcPct val="105000"/>
+              </a:lnSpc>
+              <a:buNone/>
+            </a:pPr>
+            <a:r>
+              <a:rPr lang="en-US" sz="1300" b="1" dirty="0">
+                <a:solidFill>
+                  <a:srgbClr val="F8FAFC"/>
+                </a:solidFill>
+                <a:latin typeface="Calibri" pitchFamily="34" charset="0"/>
+                <a:ea typeface="Calibri" pitchFamily="34" charset="-122"/>
+                <a:cs typeface="Calibri" pitchFamily="34" charset="-120"/>
+              </a:rPr>
+              <a:t>D COMO OPERADOR</a:t>
+            </a:r>
+            <a:endParaRPr lang="en-US" sz="1300" dirty="0"/>
+          </a:p>
+        </p:txBody>
+      </p:sp>
+      <p:sp>
+        <p:nvSpPr>
+          <p:cNvPr id="9" name="Text 7"/>
+          <p:cNvSpPr/>
+          <p:nvPr/>
+        </p:nvSpPr>
+        <p:spPr>
+          <a:xfrm>
+            <a:off x="777240" y="2468880"/>
+            <a:ext cx="3058058" cy="1417320"/>
+          </a:xfrm>
+          <a:prstGeom prst="rect">
+            <a:avLst/>
+          </a:prstGeom>
+          <a:noFill/>
+          <a:ln/>
+        </p:spPr>
+        <p:txBody>
+          <a:bodyPr wrap="square" lIns="0" tIns="0" rIns="0" bIns="0" rtlCol="0" anchor="t"/>
+          <a:lstStyle/>
+          <a:p>
+            <a:pPr algn="l" indent="0" marL="0">
+              <a:lnSpc>
+                <a:spcPct val="112000"/>
+              </a:lnSpc>
+              <a:buNone/>
+            </a:pPr>
+            <a:r>
+              <a:rPr lang="en-US" sz="1250" dirty="0">
+                <a:solidFill>
+                  <a:srgbClr val="CBD5E1"/>
+                </a:solidFill>
+                <a:latin typeface="Calibri" pitchFamily="34" charset="0"/>
+                <a:ea typeface="Calibri" pitchFamily="34" charset="-122"/>
+                <a:cs typeface="Calibri" pitchFamily="34" charset="-120"/>
+              </a:rPr>
+              <a:t>D=d/dx actúa como un número: se suma, multiplica y factoriza. Practiquen con D²−3D+2=(D−1)(D−2).</a:t>
+            </a:r>
+            <a:endParaRPr lang="en-US" sz="1250" dirty="0"/>
+          </a:p>
+        </p:txBody>
+      </p:sp>
+      <p:sp>
+        <p:nvSpPr>
+          <p:cNvPr id="10" name="Shape 8"/>
+          <p:cNvSpPr/>
+          <p:nvPr/>
+        </p:nvSpPr>
+        <p:spPr>
+          <a:xfrm>
+            <a:off x="4338218" y="1691640"/>
+            <a:ext cx="3515258" cy="2377440"/>
+          </a:xfrm>
+          <a:prstGeom prst="roundRect">
+            <a:avLst>
+              <a:gd name="adj" fmla="val 3846"/>
+            </a:avLst>
+          </a:prstGeom>
+          <a:solidFill>
+            <a:srgbClr val="1E293B"/>
+          </a:solidFill>
+          <a:ln/>
+        </p:spPr>
+      </p:sp>
+      <p:sp>
+        <p:nvSpPr>
+          <p:cNvPr id="11" name="Shape 9"/>
+          <p:cNvSpPr/>
+          <p:nvPr/>
+        </p:nvSpPr>
+        <p:spPr>
+          <a:xfrm>
+            <a:off x="4566818" y="1874520"/>
+            <a:ext cx="384048" cy="384048"/>
+          </a:xfrm>
+          <a:prstGeom prst="ellipse">
+            <a:avLst/>
+          </a:prstGeom>
+          <a:solidFill>
+            <a:srgbClr val="0B0F19"/>
+          </a:solidFill>
+          <a:ln w="25400">
+            <a:solidFill>
+              <a:srgbClr val="22D3EE"/>
+            </a:solidFill>
+            <a:prstDash val="solid"/>
+          </a:ln>
+        </p:spPr>
+      </p:sp>
+      <p:sp>
+        <p:nvSpPr>
+          <p:cNvPr id="12" name="Text 10"/>
+          <p:cNvSpPr/>
+          <p:nvPr/>
+        </p:nvSpPr>
+        <p:spPr>
+          <a:xfrm>
+            <a:off x="4566818" y="1874520"/>
+            <a:ext cx="384048" cy="384048"/>
+          </a:xfrm>
+          <a:prstGeom prst="rect">
+            <a:avLst/>
+          </a:prstGeom>
+          <a:noFill/>
+          <a:ln/>
+        </p:spPr>
+        <p:txBody>
+          <a:bodyPr wrap="square" lIns="0" tIns="0" rIns="0" bIns="0" rtlCol="0" anchor="ctr"/>
+          <a:lstStyle/>
+          <a:p>
+            <a:pPr algn="ctr" indent="0" marL="0">
+              <a:buNone/>
+            </a:pPr>
+            <a:r>
+              <a:rPr lang="en-US" sz="1600" b="1" dirty="0">
+                <a:solidFill>
+                  <a:srgbClr val="22D3EE"/>
+                </a:solidFill>
+                <a:latin typeface="Calibri" pitchFamily="34" charset="0"/>
+                <a:ea typeface="Calibri" pitchFamily="34" charset="-122"/>
+                <a:cs typeface="Calibri" pitchFamily="34" charset="-120"/>
+              </a:rPr>
+              <a:t>2</a:t>
+            </a:r>
+            <a:endParaRPr lang="en-US" sz="1600" dirty="0"/>
+          </a:p>
+        </p:txBody>
+      </p:sp>
+      <p:sp>
+        <p:nvSpPr>
+          <p:cNvPr id="13" name="Text 11"/>
+          <p:cNvSpPr/>
+          <p:nvPr/>
+        </p:nvSpPr>
+        <p:spPr>
+          <a:xfrm>
+            <a:off x="5069738" y="1874520"/>
+            <a:ext cx="2555138" cy="384048"/>
+          </a:xfrm>
+          <a:prstGeom prst="rect">
+            <a:avLst/>
+          </a:prstGeom>
+          <a:noFill/>
+          <a:ln/>
+        </p:spPr>
+        <p:txBody>
+          <a:bodyPr wrap="square" lIns="0" tIns="0" rIns="0" bIns="0" rtlCol="0" anchor="ctr"/>
+          <a:lstStyle/>
+          <a:p>
+            <a:pPr indent="0" marL="0">
+              <a:lnSpc>
+                <a:spcPct val="105000"/>
+              </a:lnSpc>
+              <a:buNone/>
+            </a:pPr>
+            <a:r>
+              <a:rPr lang="en-US" sz="1300" b="1" dirty="0">
+                <a:solidFill>
+                  <a:srgbClr val="F8FAFC"/>
+                </a:solidFill>
+                <a:latin typeface="Calibri" pitchFamily="34" charset="0"/>
+                <a:ea typeface="Calibri" pitchFamily="34" charset="-122"/>
+                <a:cs typeface="Calibri" pitchFamily="34" charset="-120"/>
+              </a:rPr>
+              <a:t>POR QUÉ ANIQUILA</a:t>
+            </a:r>
+            <a:endParaRPr lang="en-US" sz="1300" dirty="0"/>
+          </a:p>
+        </p:txBody>
+      </p:sp>
+      <p:sp>
+        <p:nvSpPr>
+          <p:cNvPr id="14" name="Text 12"/>
+          <p:cNvSpPr/>
+          <p:nvPr/>
+        </p:nvSpPr>
+        <p:spPr>
+          <a:xfrm>
+            <a:off x="4566818" y="2468880"/>
+            <a:ext cx="3058058" cy="1417320"/>
+          </a:xfrm>
+          <a:prstGeom prst="rect">
+            <a:avLst/>
+          </a:prstGeom>
+          <a:noFill/>
+          <a:ln/>
+        </p:spPr>
+        <p:txBody>
+          <a:bodyPr wrap="square" lIns="0" tIns="0" rIns="0" bIns="0" rtlCol="0" anchor="t"/>
+          <a:lstStyle/>
+          <a:p>
+            <a:pPr algn="l" indent="0" marL="0">
+              <a:lnSpc>
+                <a:spcPct val="112000"/>
+              </a:lnSpc>
+              <a:buNone/>
+            </a:pPr>
+            <a:r>
+              <a:rPr lang="en-US" sz="1250" dirty="0">
+                <a:solidFill>
+                  <a:srgbClr val="CBD5E1"/>
+                </a:solidFill>
+                <a:latin typeface="Calibri" pitchFamily="34" charset="0"/>
+                <a:ea typeface="Calibri" pitchFamily="34" charset="-122"/>
+                <a:cs typeface="Calibri" pitchFamily="34" charset="-120"/>
+              </a:rPr>
+              <a:t>(D−r) elimina eʳˣ; (D−r)² elimina xeʳˣ; Dᵏ⁺¹ elimina un polinomio de grado k.</a:t>
+            </a:r>
+            <a:endParaRPr lang="en-US" sz="1250" dirty="0"/>
+          </a:p>
+        </p:txBody>
+      </p:sp>
+      <p:sp>
+        <p:nvSpPr>
+          <p:cNvPr id="15" name="Shape 13"/>
+          <p:cNvSpPr/>
+          <p:nvPr/>
+        </p:nvSpPr>
+        <p:spPr>
+          <a:xfrm>
+            <a:off x="8127797" y="1691640"/>
+            <a:ext cx="3515258" cy="2377440"/>
+          </a:xfrm>
+          <a:prstGeom prst="roundRect">
+            <a:avLst>
+              <a:gd name="adj" fmla="val 3846"/>
+            </a:avLst>
+          </a:prstGeom>
+          <a:solidFill>
+            <a:srgbClr val="1E293B"/>
+          </a:solidFill>
+          <a:ln/>
+        </p:spPr>
+      </p:sp>
+      <p:sp>
+        <p:nvSpPr>
+          <p:cNvPr id="16" name="Shape 14"/>
+          <p:cNvSpPr/>
+          <p:nvPr/>
+        </p:nvSpPr>
+        <p:spPr>
+          <a:xfrm>
+            <a:off x="8356397" y="1874520"/>
+            <a:ext cx="384048" cy="384048"/>
+          </a:xfrm>
+          <a:prstGeom prst="ellipse">
+            <a:avLst/>
+          </a:prstGeom>
+          <a:solidFill>
+            <a:srgbClr val="0B0F19"/>
+          </a:solidFill>
+          <a:ln w="25400">
+            <a:solidFill>
+              <a:srgbClr val="22D3EE"/>
+            </a:solidFill>
+            <a:prstDash val="solid"/>
+          </a:ln>
+        </p:spPr>
+      </p:sp>
+      <p:sp>
+        <p:nvSpPr>
+          <p:cNvPr id="17" name="Text 15"/>
+          <p:cNvSpPr/>
+          <p:nvPr/>
+        </p:nvSpPr>
+        <p:spPr>
+          <a:xfrm>
+            <a:off x="8356397" y="1874520"/>
+            <a:ext cx="384048" cy="384048"/>
+          </a:xfrm>
+          <a:prstGeom prst="rect">
+            <a:avLst/>
+          </a:prstGeom>
+          <a:noFill/>
+          <a:ln/>
+        </p:spPr>
+        <p:txBody>
+          <a:bodyPr wrap="square" lIns="0" tIns="0" rIns="0" bIns="0" rtlCol="0" anchor="ctr"/>
+          <a:lstStyle/>
+          <a:p>
+            <a:pPr algn="ctr" indent="0" marL="0">
+              <a:buNone/>
+            </a:pPr>
+            <a:r>
+              <a:rPr lang="en-US" sz="1600" b="1" dirty="0">
+                <a:solidFill>
+                  <a:srgbClr val="22D3EE"/>
+                </a:solidFill>
+                <a:latin typeface="Calibri" pitchFamily="34" charset="0"/>
+                <a:ea typeface="Calibri" pitchFamily="34" charset="-122"/>
+                <a:cs typeface="Calibri" pitchFamily="34" charset="-120"/>
+              </a:rPr>
+              <a:t>3</a:t>
+            </a:r>
+            <a:endParaRPr lang="en-US" sz="1600" dirty="0"/>
+          </a:p>
+        </p:txBody>
+      </p:sp>
+      <p:sp>
+        <p:nvSpPr>
+          <p:cNvPr id="18" name="Text 16"/>
+          <p:cNvSpPr/>
+          <p:nvPr/>
+        </p:nvSpPr>
+        <p:spPr>
+          <a:xfrm>
+            <a:off x="8859317" y="1874520"/>
+            <a:ext cx="2555138" cy="384048"/>
+          </a:xfrm>
+          <a:prstGeom prst="rect">
+            <a:avLst/>
+          </a:prstGeom>
+          <a:noFill/>
+          <a:ln/>
+        </p:spPr>
+        <p:txBody>
+          <a:bodyPr wrap="square" lIns="0" tIns="0" rIns="0" bIns="0" rtlCol="0" anchor="ctr"/>
+          <a:lstStyle/>
+          <a:p>
+            <a:pPr indent="0" marL="0">
+              <a:lnSpc>
+                <a:spcPct val="105000"/>
+              </a:lnSpc>
+              <a:buNone/>
+            </a:pPr>
+            <a:r>
+              <a:rPr lang="en-US" sz="1300" b="1" dirty="0">
+                <a:solidFill>
+                  <a:srgbClr val="F8FAFC"/>
+                </a:solidFill>
+                <a:latin typeface="Calibri" pitchFamily="34" charset="0"/>
+                <a:ea typeface="Calibri" pitchFamily="34" charset="-122"/>
+                <a:cs typeface="Calibri" pitchFamily="34" charset="-120"/>
+              </a:rPr>
+              <a:t>CONECTANDO CON HOY</a:t>
+            </a:r>
+            <a:endParaRPr lang="en-US" sz="1300" dirty="0"/>
+          </a:p>
+        </p:txBody>
+      </p:sp>
+      <p:sp>
+        <p:nvSpPr>
+          <p:cNvPr id="19" name="Text 17"/>
+          <p:cNvSpPr/>
+          <p:nvPr/>
+        </p:nvSpPr>
+        <p:spPr>
+          <a:xfrm>
+            <a:off x="8356397" y="2468880"/>
+            <a:ext cx="3058058" cy="1417320"/>
+          </a:xfrm>
+          <a:prstGeom prst="rect">
+            <a:avLst/>
+          </a:prstGeom>
+          <a:noFill/>
+          <a:ln/>
+        </p:spPr>
+        <p:txBody>
+          <a:bodyPr wrap="square" lIns="0" tIns="0" rIns="0" bIns="0" rtlCol="0" anchor="t"/>
+          <a:lstStyle/>
+          <a:p>
+            <a:pPr algn="l" indent="0" marL="0">
+              <a:lnSpc>
+                <a:spcPct val="112000"/>
+              </a:lnSpc>
+              <a:buNone/>
+            </a:pPr>
+            <a:r>
+              <a:rPr lang="en-US" sz="1250" dirty="0">
+                <a:solidFill>
+                  <a:srgbClr val="CBD5E1"/>
+                </a:solidFill>
+                <a:latin typeface="Calibri" pitchFamily="34" charset="0"/>
+                <a:ea typeface="Calibri" pitchFamily="34" charset="-122"/>
+                <a:cs typeface="Calibri" pitchFamily="34" charset="-120"/>
+              </a:rPr>
+              <a:t>Con la superposición de hoy: ¿qué operador aniquila una suma de términos distintos, como 3x+e²ˣ?</a:t>
+            </a:r>
+            <a:endParaRPr lang="en-US" sz="1250" dirty="0"/>
+          </a:p>
+        </p:txBody>
+      </p:sp>
+      <p:sp>
+        <p:nvSpPr>
+          <p:cNvPr id="20" name="Shape 18"/>
+          <p:cNvSpPr/>
+          <p:nvPr/>
+        </p:nvSpPr>
+        <p:spPr>
+          <a:xfrm>
+            <a:off x="548640" y="4297680"/>
+            <a:ext cx="11094415" cy="777240"/>
+          </a:xfrm>
+          <a:prstGeom prst="roundRect">
+            <a:avLst>
+              <a:gd name="adj" fmla="val 9412"/>
+            </a:avLst>
+          </a:prstGeom>
+          <a:solidFill>
+            <a:srgbClr val="142B1F"/>
+          </a:solidFill>
+          <a:ln w="12700">
+            <a:solidFill>
+              <a:srgbClr val="34D399"/>
+            </a:solidFill>
+            <a:prstDash val="solid"/>
+          </a:ln>
+        </p:spPr>
+      </p:sp>
+      <p:sp>
+        <p:nvSpPr>
+          <p:cNvPr id="21" name="Text 19"/>
+          <p:cNvSpPr/>
+          <p:nvPr/>
+        </p:nvSpPr>
+        <p:spPr>
+          <a:xfrm>
+            <a:off x="777240" y="4297680"/>
+            <a:ext cx="10637215" cy="777240"/>
+          </a:xfrm>
+          <a:prstGeom prst="rect">
+            <a:avLst/>
+          </a:prstGeom>
+          <a:noFill/>
+          <a:ln/>
+        </p:spPr>
+        <p:txBody>
+          <a:bodyPr wrap="square" lIns="0" tIns="0" rIns="0" bIns="0" rtlCol="0" anchor="ctr"/>
+          <a:lstStyle/>
+          <a:p>
+            <a:pPr algn="l" indent="0" marL="0">
+              <a:lnSpc>
+                <a:spcPct val="115000"/>
+              </a:lnSpc>
+              <a:buNone/>
+            </a:pPr>
+            <a:r>
+              <a:rPr lang="en-US" sz="1350" b="1" dirty="0">
+                <a:solidFill>
+                  <a:srgbClr val="34D399"/>
+                </a:solidFill>
+                <a:latin typeface="Calibri" pitchFamily="34" charset="0"/>
+                <a:ea typeface="Calibri" pitchFamily="34" charset="-122"/>
+                <a:cs typeface="Calibri" pitchFamily="34" charset="-120"/>
+              </a:rPr>
+              <a:t>30–40 minutos, individual, en su cuaderno. La reviso al inicio de la Sesión 10 — visto/no visto, sin rúbrica detallada.</a:t>
+            </a:r>
+            <a:endParaRPr lang="en-US" sz="1350" dirty="0"/>
+          </a:p>
+        </p:txBody>
+      </p:sp>
+      <p:sp>
+        <p:nvSpPr>
+          <p:cNvPr id="22" name="Text 20"/>
+          <p:cNvSpPr/>
+          <p:nvPr/>
+        </p:nvSpPr>
+        <p:spPr>
+          <a:xfrm>
+            <a:off x="548640" y="6528816"/>
+            <a:ext cx="4572000" cy="256032"/>
+          </a:xfrm>
+          <a:prstGeom prst="rect">
+            <a:avLst/>
+          </a:prstGeom>
+          <a:noFill/>
+          <a:ln/>
+        </p:spPr>
+        <p:txBody>
+          <a:bodyPr wrap="square" lIns="0" tIns="0" rIns="0" bIns="0" rtlCol="0" anchor="ctr"/>
+          <a:lstStyle/>
+          <a:p>
+            <a:pPr indent="0" marL="0">
+              <a:buNone/>
+            </a:pPr>
+            <a:r>
+              <a:rPr lang="en-US" sz="900" spc="120" kern="0" dirty="0">
+                <a:solidFill>
+                  <a:srgbClr val="94A3B8"/>
+                </a:solidFill>
+                <a:latin typeface="Calibri" pitchFamily="34" charset="0"/>
+                <a:ea typeface="Calibri" pitchFamily="34" charset="-122"/>
+                <a:cs typeface="Calibri" pitchFamily="34" charset="-120"/>
+              </a:rPr>
+              <a:t>SESIÓN 9 · CÁLCULO III</a:t>
+            </a:r>
+            <a:endParaRPr lang="en-US" sz="900" dirty="0"/>
+          </a:p>
+        </p:txBody>
+      </p:sp>
+      <p:sp>
+        <p:nvSpPr>
+          <p:cNvPr id="23" name="Text 21"/>
+          <p:cNvSpPr/>
+          <p:nvPr/>
+        </p:nvSpPr>
+        <p:spPr>
+          <a:xfrm>
+            <a:off x="11094415" y="6528816"/>
+            <a:ext cx="548640" cy="256032"/>
+          </a:xfrm>
+          <a:prstGeom prst="rect">
+            <a:avLst/>
+          </a:prstGeom>
+          <a:noFill/>
+          <a:ln/>
+        </p:spPr>
+        <p:txBody>
+          <a:bodyPr wrap="square" lIns="0" tIns="0" rIns="0" bIns="0" rtlCol="0" anchor="ctr"/>
+          <a:lstStyle/>
+          <a:p>
+            <a:pPr algn="r" indent="0" marL="0">
+              <a:buNone/>
+            </a:pPr>
+            <a:r>
+              <a:rPr lang="en-US" sz="900" dirty="0">
+                <a:solidFill>
+                  <a:srgbClr val="94A3B8"/>
+                </a:solidFill>
+                <a:latin typeface="Calibri" pitchFamily="34" charset="0"/>
+                <a:ea typeface="Calibri" pitchFamily="34" charset="-122"/>
+                <a:cs typeface="Calibri" pitchFamily="34" charset="-120"/>
+              </a:rPr>
+              <a:t>16</a:t>
             </a:r>
             <a:endParaRPr lang="en-US" sz="900" dirty="0"/>
           </a:p>
@@ -8913,12 +10110,12 @@
         </p:nvSpPr>
         <p:spPr>
           <a:xfrm>
-            <a:off x="548640" y="1691640"/>
-            <a:ext cx="11094415" cy="1051560"/>
+            <a:off x="548640" y="1600200"/>
+            <a:ext cx="11094415" cy="868680"/>
           </a:xfrm>
           <a:prstGeom prst="roundRect">
             <a:avLst>
-              <a:gd name="adj" fmla="val 6957"/>
+              <a:gd name="adj" fmla="val 8421"/>
             </a:avLst>
           </a:prstGeom>
           <a:solidFill>
@@ -8932,9 +10129,48 @@
           </a:ln>
         </p:spPr>
       </p:sp>
+      <p:sp>
+        <p:nvSpPr>
+          <p:cNvPr id="5" name="Text 3"/>
+          <p:cNvSpPr/>
+          <p:nvPr/>
+        </p:nvSpPr>
+        <p:spPr>
+          <a:xfrm>
+            <a:off x="822960" y="1691640"/>
+            <a:ext cx="10545775" cy="228600"/>
+          </a:xfrm>
+          <a:prstGeom prst="rect">
+            <a:avLst/>
+          </a:prstGeom>
+          <a:noFill/>
+          <a:ln/>
+        </p:spPr>
+        <p:txBody>
+          <a:bodyPr wrap="square" lIns="0" tIns="0" rIns="0" bIns="0" rtlCol="0" anchor="t"/>
+          <a:lstStyle/>
+          <a:p>
+            <a:pPr algn="l" indent="0" marL="0">
+              <a:buNone/>
+            </a:pPr>
+            <a:r>
+              <a:rPr lang="en-US" sz="1300" b="1" dirty="0">
+                <a:solidFill>
+                  <a:srgbClr val="22D3EE"/>
+                </a:solidFill>
+                <a:latin typeface="Calibri" pitchFamily="34" charset="0"/>
+                <a:ea typeface="Calibri" pitchFamily="34" charset="-122"/>
+                <a:cs typeface="Calibri" pitchFamily="34" charset="-120"/>
+              </a:rPr>
+              <a:t>CASO: DOS FUNCIONES</a:t>
+            </a:r>
+            <a:endParaRPr lang="en-US" sz="1300" dirty="0"/>
+          </a:p>
+        </p:txBody>
+      </p:sp>
       <p:pic>
         <p:nvPicPr>
-          <p:cNvPr id="5" name="Image 0" descr="build/eq/wronskian_def.png">    </p:cNvPr>
+          <p:cNvPr id="6" name="Image 0" descr="build/eq/wronskian_def.png">    </p:cNvPr>
           <p:cNvPicPr>
             <a:picLocks noChangeAspect="1"/>
           </p:cNvPicPr>
@@ -8948,8 +10184,8 @@
         </p:blipFill>
         <p:spPr>
           <a:xfrm>
-            <a:off x="3112800" y="1828800"/>
-            <a:ext cx="5966094" cy="777240"/>
+            <a:off x="4165641" y="1920240"/>
+            <a:ext cx="3860414" cy="502920"/>
           </a:xfrm>
           <a:prstGeom prst="rect">
             <a:avLst/>
@@ -8958,14 +10194,99 @@
       </p:pic>
       <p:sp>
         <p:nvSpPr>
-          <p:cNvPr id="6" name="Text 3"/>
-          <p:cNvSpPr/>
-          <p:nvPr/>
-        </p:nvSpPr>
-        <p:spPr>
-          <a:xfrm>
-            <a:off x="548640" y="3017520"/>
-            <a:ext cx="11094415" cy="777240"/>
+          <p:cNvPr id="7" name="Shape 4"/>
+          <p:cNvSpPr/>
+          <p:nvPr/>
+        </p:nvSpPr>
+        <p:spPr>
+          <a:xfrm>
+            <a:off x="548640" y="2560320"/>
+            <a:ext cx="11094415" cy="1188720"/>
+          </a:xfrm>
+          <a:prstGeom prst="roundRect">
+            <a:avLst>
+              <a:gd name="adj" fmla="val 7692"/>
+            </a:avLst>
+          </a:prstGeom>
+          <a:solidFill>
+            <a:srgbClr val="1E293B"/>
+          </a:solidFill>
+          <a:ln/>
+        </p:spPr>
+      </p:sp>
+      <p:sp>
+        <p:nvSpPr>
+          <p:cNvPr id="8" name="Text 5"/>
+          <p:cNvSpPr/>
+          <p:nvPr/>
+        </p:nvSpPr>
+        <p:spPr>
+          <a:xfrm>
+            <a:off x="822960" y="2651760"/>
+            <a:ext cx="10545775" cy="228600"/>
+          </a:xfrm>
+          <a:prstGeom prst="rect">
+            <a:avLst/>
+          </a:prstGeom>
+          <a:noFill/>
+          <a:ln/>
+        </p:spPr>
+        <p:txBody>
+          <a:bodyPr wrap="square" lIns="0" tIns="0" rIns="0" bIns="0" rtlCol="0" anchor="t"/>
+          <a:lstStyle/>
+          <a:p>
+            <a:pPr algn="l" indent="0" marL="0">
+              <a:buNone/>
+            </a:pPr>
+            <a:r>
+              <a:rPr lang="en-US" sz="1300" b="1" dirty="0">
+                <a:solidFill>
+                  <a:srgbClr val="CBD5E1"/>
+                </a:solidFill>
+                <a:latin typeface="Calibri" pitchFamily="34" charset="0"/>
+                <a:ea typeface="Calibri" pitchFamily="34" charset="-122"/>
+                <a:cs typeface="Calibri" pitchFamily="34" charset="-120"/>
+              </a:rPr>
+              <a:t>FORMA GENERAL: n FUNCIONES</a:t>
+            </a:r>
+            <a:endParaRPr lang="en-US" sz="1300" dirty="0"/>
+          </a:p>
+        </p:txBody>
+      </p:sp>
+      <p:pic>
+        <p:nvPicPr>
+          <p:cNvPr id="9" name="Image 1" descr="build/img/wronskian_general.png">    </p:cNvPr>
+          <p:cNvPicPr>
+            <a:picLocks noChangeAspect="1"/>
+          </p:cNvPicPr>
+          <p:nvPr/>
+        </p:nvPicPr>
+        <p:blipFill>
+          <a:blip r:embed="rId2"/>
+          <a:stretch>
+            <a:fillRect/>
+          </a:stretch>
+        </p:blipFill>
+        <p:spPr>
+          <a:xfrm>
+            <a:off x="4929811" y="2880360"/>
+            <a:ext cx="2332074" cy="822960"/>
+          </a:xfrm>
+          <a:prstGeom prst="rect">
+            <a:avLst/>
+          </a:prstGeom>
+        </p:spPr>
+      </p:pic>
+      <p:sp>
+        <p:nvSpPr>
+          <p:cNvPr id="10" name="Text 6"/>
+          <p:cNvSpPr/>
+          <p:nvPr/>
+        </p:nvSpPr>
+        <p:spPr>
+          <a:xfrm>
+            <a:off x="548640" y="3886200"/>
+            <a:ext cx="11094415" cy="640080"/>
           </a:xfrm>
           <a:prstGeom prst="rect">
             <a:avLst/>
@@ -8984,7 +10305,7 @@
               <a:buNone/>
             </a:pPr>
             <a:r>
-              <a:rPr lang="en-US" sz="1500" dirty="0">
+              <a:rPr lang="en-US" sz="1400" dirty="0">
                 <a:solidFill>
                   <a:srgbClr val="CBD5E1"/>
                 </a:solidFill>
@@ -8994,24 +10315,24 @@
               </a:rPr>
               <a:t>Teorema: si y₁, …, yₙ son soluciones de la MISMA ecuación lineal homogénea, son linealmente independientes en un intervalo si y solo si su Wronskiano nunca se anula ahí.</a:t>
             </a:r>
-            <a:endParaRPr lang="en-US" sz="1500" dirty="0"/>
-          </a:p>
-        </p:txBody>
-      </p:sp>
-      <p:sp>
-        <p:nvSpPr>
-          <p:cNvPr id="7" name="Shape 4"/>
-          <p:cNvSpPr/>
-          <p:nvPr/>
-        </p:nvSpPr>
-        <p:spPr>
-          <a:xfrm>
-            <a:off x="548640" y="4023360"/>
-            <a:ext cx="11094415" cy="777240"/>
+            <a:endParaRPr lang="en-US" sz="1400" dirty="0"/>
+          </a:p>
+        </p:txBody>
+      </p:sp>
+      <p:sp>
+        <p:nvSpPr>
+          <p:cNvPr id="11" name="Shape 7"/>
+          <p:cNvSpPr/>
+          <p:nvPr/>
+        </p:nvSpPr>
+        <p:spPr>
+          <a:xfrm>
+            <a:off x="548640" y="4617720"/>
+            <a:ext cx="11094415" cy="731520"/>
           </a:xfrm>
           <a:prstGeom prst="roundRect">
             <a:avLst>
-              <a:gd name="adj" fmla="val 9412"/>
+              <a:gd name="adj" fmla="val 10000"/>
             </a:avLst>
           </a:prstGeom>
           <a:solidFill>
@@ -9027,14 +10348,14 @@
       </p:sp>
       <p:sp>
         <p:nvSpPr>
-          <p:cNvPr id="8" name="Text 5"/>
-          <p:cNvSpPr/>
-          <p:nvPr/>
-        </p:nvSpPr>
-        <p:spPr>
-          <a:xfrm>
-            <a:off x="777240" y="4023360"/>
-            <a:ext cx="10637215" cy="777240"/>
+          <p:cNvPr id="12" name="Text 8"/>
+          <p:cNvSpPr/>
+          <p:nvPr/>
+        </p:nvSpPr>
+        <p:spPr>
+          <a:xfrm>
+            <a:off x="777240" y="4617720"/>
+            <a:ext cx="10637215" cy="731520"/>
           </a:xfrm>
           <a:prstGeom prst="rect">
             <a:avLst/>
@@ -9053,7 +10374,7 @@
               <a:buNone/>
             </a:pPr>
             <a:r>
-              <a:rPr lang="en-US" sz="1350" b="1" dirty="0">
+              <a:rPr lang="en-US" sz="1300" b="1" dirty="0">
                 <a:solidFill>
                   <a:srgbClr val="FBBF24"/>
                 </a:solidFill>
@@ -9063,13 +10384,13 @@
               </a:rPr>
               <a:t>⚠  El Wronskiano solo es una prueba confiable cuando las funciones ya son soluciones de la misma ecuación — para funciones cualesquiera, un Wronskiano cero no garantiza dependencia.</a:t>
             </a:r>
-            <a:endParaRPr lang="en-US" sz="1350" dirty="0"/>
-          </a:p>
-        </p:txBody>
-      </p:sp>
-      <p:sp>
-        <p:nvSpPr>
-          <p:cNvPr id="9" name="Text 6"/>
+            <a:endParaRPr lang="en-US" sz="1300" dirty="0"/>
+          </a:p>
+        </p:txBody>
+      </p:sp>
+      <p:sp>
+        <p:nvSpPr>
+          <p:cNvPr id="13" name="Text 9"/>
           <p:cNvSpPr/>
           <p:nvPr/>
         </p:nvSpPr>
@@ -9108,7 +10429,7 @@
       </p:sp>
       <p:sp>
         <p:nvSpPr>
-          <p:cNvPr id="10" name="Text 7"/>
+          <p:cNvPr id="14" name="Text 10"/>
           <p:cNvSpPr/>
           <p:nvPr/>
         </p:nvSpPr>
